--- a/documentacion/fichas_curriculares/YUCATAN-2025.pptx
+++ b/documentacion/fichas_curriculares/YUCATAN-2025.pptx
@@ -7,8 +7,8 @@
   <p:sldIdLst>
     <p:sldId id="256" r:id="rId2"/>
   </p:sldIdLst>
-  <p:sldSz cx="16256000" cy="9144000"/>
-  <p:notesSz cx="7023100" cy="9309100"/>
+  <p:sldSz cx="9144000" cy="6858000" type="letter"/>
+  <p:notesSz cx="9309100" cy="7023100"/>
   <p:defaultTextStyle>
     <a:defPPr>
       <a:defRPr lang="en-US"/>
@@ -141,21 +141,21 @@
         </p:nvSpPr>
         <p:spPr>
           <a:xfrm>
-            <a:off x="2032000" y="1496484"/>
-            <a:ext cx="12192000" cy="3183467"/>
+            <a:off x="685800" y="1122363"/>
+            <a:ext cx="7772400" cy="2387600"/>
           </a:xfrm>
         </p:spPr>
         <p:txBody>
           <a:bodyPr anchor="b"/>
           <a:lstStyle>
             <a:lvl1pPr algn="ctr">
-              <a:defRPr sz="8000"/>
+              <a:defRPr sz="6000"/>
             </a:lvl1pPr>
           </a:lstStyle>
           <a:p>
             <a:r>
-              <a:rPr lang="es-ES"/>
-              <a:t>Haga clic para modificar el estilo de título del patrón</a:t>
+              <a:rPr lang="es-MX"/>
+              <a:t>Haz clic para modificar el estilo de título del patrón</a:t>
             </a:r>
             <a:endParaRPr lang="en-US" dirty="0"/>
           </a:p>
@@ -173,8 +173,8 @@
         </p:nvSpPr>
         <p:spPr>
           <a:xfrm>
-            <a:off x="2032000" y="4802717"/>
-            <a:ext cx="12192000" cy="2207683"/>
+            <a:off x="1143000" y="3602038"/>
+            <a:ext cx="6858000" cy="1655762"/>
           </a:xfrm>
         </p:spPr>
         <p:txBody>
@@ -182,45 +182,45 @@
           <a:lstStyle>
             <a:lvl1pPr marL="0" indent="0" algn="ctr">
               <a:buNone/>
-              <a:defRPr sz="3200"/>
+              <a:defRPr sz="2400"/>
             </a:lvl1pPr>
-            <a:lvl2pPr marL="609585" indent="0" algn="ctr">
-              <a:buNone/>
-              <a:defRPr sz="2667"/>
+            <a:lvl2pPr marL="457200" indent="0" algn="ctr">
+              <a:buNone/>
+              <a:defRPr sz="2000"/>
             </a:lvl2pPr>
-            <a:lvl3pPr marL="1219170" indent="0" algn="ctr">
-              <a:buNone/>
-              <a:defRPr sz="2400"/>
+            <a:lvl3pPr marL="914400" indent="0" algn="ctr">
+              <a:buNone/>
+              <a:defRPr sz="1800"/>
             </a:lvl3pPr>
-            <a:lvl4pPr marL="1828754" indent="0" algn="ctr">
-              <a:buNone/>
-              <a:defRPr sz="2133"/>
+            <a:lvl4pPr marL="1371600" indent="0" algn="ctr">
+              <a:buNone/>
+              <a:defRPr sz="1600"/>
             </a:lvl4pPr>
-            <a:lvl5pPr marL="2438339" indent="0" algn="ctr">
-              <a:buNone/>
-              <a:defRPr sz="2133"/>
+            <a:lvl5pPr marL="1828800" indent="0" algn="ctr">
+              <a:buNone/>
+              <a:defRPr sz="1600"/>
             </a:lvl5pPr>
-            <a:lvl6pPr marL="3047924" indent="0" algn="ctr">
-              <a:buNone/>
-              <a:defRPr sz="2133"/>
+            <a:lvl6pPr marL="2286000" indent="0" algn="ctr">
+              <a:buNone/>
+              <a:defRPr sz="1600"/>
             </a:lvl6pPr>
-            <a:lvl7pPr marL="3657509" indent="0" algn="ctr">
-              <a:buNone/>
-              <a:defRPr sz="2133"/>
+            <a:lvl7pPr marL="2743200" indent="0" algn="ctr">
+              <a:buNone/>
+              <a:defRPr sz="1600"/>
             </a:lvl7pPr>
-            <a:lvl8pPr marL="4267093" indent="0" algn="ctr">
-              <a:buNone/>
-              <a:defRPr sz="2133"/>
+            <a:lvl8pPr marL="3200400" indent="0" algn="ctr">
+              <a:buNone/>
+              <a:defRPr sz="1600"/>
             </a:lvl8pPr>
-            <a:lvl9pPr marL="4876678" indent="0" algn="ctr">
-              <a:buNone/>
-              <a:defRPr sz="2133"/>
+            <a:lvl9pPr marL="3657600" indent="0" algn="ctr">
+              <a:buNone/>
+              <a:defRPr sz="1600"/>
             </a:lvl9pPr>
           </a:lstStyle>
           <a:p>
             <a:r>
-              <a:rPr lang="es-ES"/>
-              <a:t>Haga clic para modificar el estilo de subtítulo del patrón</a:t>
+              <a:rPr lang="es-MX"/>
+              <a:t>Haz clic para editar el estilo de subtítulo del patrón</a:t>
             </a:r>
             <a:endParaRPr lang="en-US" dirty="0"/>
           </a:p>
@@ -243,7 +243,7 @@
           <a:p>
             <a:fld id="{664CB750-BDA0-4B3C-9407-BAF21E562682}" type="datetimeFigureOut">
               <a:rPr lang="es-MX" smtClean="0"/>
-              <a:t>09/06/2025</a:t>
+              <a:t>04.07.2025</a:t>
             </a:fld>
             <a:endParaRPr lang="es-MX"/>
           </a:p>
@@ -294,7 +294,7 @@
     </p:spTree>
     <p:extLst>
       <p:ext uri="{BB962C8B-B14F-4D97-AF65-F5344CB8AC3E}">
-        <p14:creationId xmlns:p14="http://schemas.microsoft.com/office/powerpoint/2010/main" val="2178662166"/>
+        <p14:creationId xmlns:p14="http://schemas.microsoft.com/office/powerpoint/2010/main" val="2722627257"/>
       </p:ext>
     </p:extLst>
   </p:cSld>
@@ -337,8 +337,8 @@
           <a:lstStyle/>
           <a:p>
             <a:r>
-              <a:rPr lang="es-ES"/>
-              <a:t>Haga clic para modificar el estilo de título del patrón</a:t>
+              <a:rPr lang="es-MX"/>
+              <a:t>Haz clic para modificar el estilo de título del patrón</a:t>
             </a:r>
             <a:endParaRPr lang="en-US" dirty="0"/>
           </a:p>
@@ -361,35 +361,35 @@
           <a:p>
             <a:pPr lvl="0"/>
             <a:r>
-              <a:rPr lang="es-ES"/>
+              <a:rPr lang="es-MX"/>
               <a:t>Haga clic para modificar los estilos de texto del patrón</a:t>
             </a:r>
           </a:p>
           <a:p>
             <a:pPr lvl="1"/>
             <a:r>
-              <a:rPr lang="es-ES"/>
+              <a:rPr lang="es-MX"/>
               <a:t>Segundo nivel</a:t>
             </a:r>
           </a:p>
           <a:p>
             <a:pPr lvl="2"/>
             <a:r>
-              <a:rPr lang="es-ES"/>
+              <a:rPr lang="es-MX"/>
               <a:t>Tercer nivel</a:t>
             </a:r>
           </a:p>
           <a:p>
             <a:pPr lvl="3"/>
             <a:r>
-              <a:rPr lang="es-ES"/>
+              <a:rPr lang="es-MX"/>
               <a:t>Cuarto nivel</a:t>
             </a:r>
           </a:p>
           <a:p>
             <a:pPr lvl="4"/>
             <a:r>
-              <a:rPr lang="es-ES"/>
+              <a:rPr lang="es-MX"/>
               <a:t>Quinto nivel</a:t>
             </a:r>
             <a:endParaRPr lang="en-US" dirty="0"/>
@@ -413,7 +413,7 @@
           <a:p>
             <a:fld id="{664CB750-BDA0-4B3C-9407-BAF21E562682}" type="datetimeFigureOut">
               <a:rPr lang="es-MX" smtClean="0"/>
-              <a:t>09/06/2025</a:t>
+              <a:t>04.07.2025</a:t>
             </a:fld>
             <a:endParaRPr lang="es-MX"/>
           </a:p>
@@ -464,7 +464,7 @@
     </p:spTree>
     <p:extLst>
       <p:ext uri="{BB962C8B-B14F-4D97-AF65-F5344CB8AC3E}">
-        <p14:creationId xmlns:p14="http://schemas.microsoft.com/office/powerpoint/2010/main" val="661821371"/>
+        <p14:creationId xmlns:p14="http://schemas.microsoft.com/office/powerpoint/2010/main" val="3244355951"/>
       </p:ext>
     </p:extLst>
   </p:cSld>
@@ -503,8 +503,8 @@
         </p:nvSpPr>
         <p:spPr>
           <a:xfrm>
-            <a:off x="11633200" y="486834"/>
-            <a:ext cx="3505200" cy="7749117"/>
+            <a:off x="6543675" y="365125"/>
+            <a:ext cx="1971675" cy="5811838"/>
           </a:xfrm>
         </p:spPr>
         <p:txBody>
@@ -512,8 +512,8 @@
           <a:lstStyle/>
           <a:p>
             <a:r>
-              <a:rPr lang="es-ES"/>
-              <a:t>Haga clic para modificar el estilo de título del patrón</a:t>
+              <a:rPr lang="es-MX"/>
+              <a:t>Haz clic para modificar el estilo de título del patrón</a:t>
             </a:r>
             <a:endParaRPr lang="en-US" dirty="0"/>
           </a:p>
@@ -531,8 +531,8 @@
         </p:nvSpPr>
         <p:spPr>
           <a:xfrm>
-            <a:off x="1117600" y="486834"/>
-            <a:ext cx="10312400" cy="7749117"/>
+            <a:off x="628650" y="365125"/>
+            <a:ext cx="5800725" cy="5811838"/>
           </a:xfrm>
         </p:spPr>
         <p:txBody>
@@ -541,35 +541,35 @@
           <a:p>
             <a:pPr lvl="0"/>
             <a:r>
-              <a:rPr lang="es-ES"/>
+              <a:rPr lang="es-MX"/>
               <a:t>Haga clic para modificar los estilos de texto del patrón</a:t>
             </a:r>
           </a:p>
           <a:p>
             <a:pPr lvl="1"/>
             <a:r>
-              <a:rPr lang="es-ES"/>
+              <a:rPr lang="es-MX"/>
               <a:t>Segundo nivel</a:t>
             </a:r>
           </a:p>
           <a:p>
             <a:pPr lvl="2"/>
             <a:r>
-              <a:rPr lang="es-ES"/>
+              <a:rPr lang="es-MX"/>
               <a:t>Tercer nivel</a:t>
             </a:r>
           </a:p>
           <a:p>
             <a:pPr lvl="3"/>
             <a:r>
-              <a:rPr lang="es-ES"/>
+              <a:rPr lang="es-MX"/>
               <a:t>Cuarto nivel</a:t>
             </a:r>
           </a:p>
           <a:p>
             <a:pPr lvl="4"/>
             <a:r>
-              <a:rPr lang="es-ES"/>
+              <a:rPr lang="es-MX"/>
               <a:t>Quinto nivel</a:t>
             </a:r>
             <a:endParaRPr lang="en-US" dirty="0"/>
@@ -593,7 +593,7 @@
           <a:p>
             <a:fld id="{664CB750-BDA0-4B3C-9407-BAF21E562682}" type="datetimeFigureOut">
               <a:rPr lang="es-MX" smtClean="0"/>
-              <a:t>09/06/2025</a:t>
+              <a:t>04.07.2025</a:t>
             </a:fld>
             <a:endParaRPr lang="es-MX"/>
           </a:p>
@@ -644,7 +644,7 @@
     </p:spTree>
     <p:extLst>
       <p:ext uri="{BB962C8B-B14F-4D97-AF65-F5344CB8AC3E}">
-        <p14:creationId xmlns:p14="http://schemas.microsoft.com/office/powerpoint/2010/main" val="1050320016"/>
+        <p14:creationId xmlns:p14="http://schemas.microsoft.com/office/powerpoint/2010/main" val="2896061532"/>
       </p:ext>
     </p:extLst>
   </p:cSld>
@@ -687,8 +687,8 @@
           <a:lstStyle/>
           <a:p>
             <a:r>
-              <a:rPr lang="es-ES"/>
-              <a:t>Haga clic para modificar el estilo de título del patrón</a:t>
+              <a:rPr lang="es-MX"/>
+              <a:t>Haz clic para modificar el estilo de título del patrón</a:t>
             </a:r>
             <a:endParaRPr lang="en-US" dirty="0"/>
           </a:p>
@@ -711,35 +711,35 @@
           <a:p>
             <a:pPr lvl="0"/>
             <a:r>
-              <a:rPr lang="es-ES"/>
+              <a:rPr lang="es-MX"/>
               <a:t>Haga clic para modificar los estilos de texto del patrón</a:t>
             </a:r>
           </a:p>
           <a:p>
             <a:pPr lvl="1"/>
             <a:r>
-              <a:rPr lang="es-ES"/>
+              <a:rPr lang="es-MX"/>
               <a:t>Segundo nivel</a:t>
             </a:r>
           </a:p>
           <a:p>
             <a:pPr lvl="2"/>
             <a:r>
-              <a:rPr lang="es-ES"/>
+              <a:rPr lang="es-MX"/>
               <a:t>Tercer nivel</a:t>
             </a:r>
           </a:p>
           <a:p>
             <a:pPr lvl="3"/>
             <a:r>
-              <a:rPr lang="es-ES"/>
+              <a:rPr lang="es-MX"/>
               <a:t>Cuarto nivel</a:t>
             </a:r>
           </a:p>
           <a:p>
             <a:pPr lvl="4"/>
             <a:r>
-              <a:rPr lang="es-ES"/>
+              <a:rPr lang="es-MX"/>
               <a:t>Quinto nivel</a:t>
             </a:r>
             <a:endParaRPr lang="en-US" dirty="0"/>
@@ -763,7 +763,7 @@
           <a:p>
             <a:fld id="{664CB750-BDA0-4B3C-9407-BAF21E562682}" type="datetimeFigureOut">
               <a:rPr lang="es-MX" smtClean="0"/>
-              <a:t>09/06/2025</a:t>
+              <a:t>04.07.2025</a:t>
             </a:fld>
             <a:endParaRPr lang="es-MX"/>
           </a:p>
@@ -814,7 +814,7 @@
     </p:spTree>
     <p:extLst>
       <p:ext uri="{BB962C8B-B14F-4D97-AF65-F5344CB8AC3E}">
-        <p14:creationId xmlns:p14="http://schemas.microsoft.com/office/powerpoint/2010/main" val="3531259725"/>
+        <p14:creationId xmlns:p14="http://schemas.microsoft.com/office/powerpoint/2010/main" val="3310185284"/>
       </p:ext>
     </p:extLst>
   </p:cSld>
@@ -853,21 +853,21 @@
         </p:nvSpPr>
         <p:spPr>
           <a:xfrm>
-            <a:off x="1109133" y="2279652"/>
-            <a:ext cx="14020800" cy="3803649"/>
+            <a:off x="623888" y="1709739"/>
+            <a:ext cx="7886700" cy="2852737"/>
           </a:xfrm>
         </p:spPr>
         <p:txBody>
           <a:bodyPr anchor="b"/>
           <a:lstStyle>
             <a:lvl1pPr>
-              <a:defRPr sz="8000"/>
+              <a:defRPr sz="6000"/>
             </a:lvl1pPr>
           </a:lstStyle>
           <a:p>
             <a:r>
-              <a:rPr lang="es-ES"/>
-              <a:t>Haga clic para modificar el estilo de título del patrón</a:t>
+              <a:rPr lang="es-MX"/>
+              <a:t>Haz clic para modificar el estilo de título del patrón</a:t>
             </a:r>
             <a:endParaRPr lang="en-US" dirty="0"/>
           </a:p>
@@ -885,8 +885,8 @@
         </p:nvSpPr>
         <p:spPr>
           <a:xfrm>
-            <a:off x="1109133" y="6119285"/>
-            <a:ext cx="14020800" cy="2000249"/>
+            <a:off x="623888" y="4589464"/>
+            <a:ext cx="7886700" cy="1500187"/>
           </a:xfrm>
         </p:spPr>
         <p:txBody>
@@ -894,99 +894,97 @@
           <a:lstStyle>
             <a:lvl1pPr marL="0" indent="0">
               <a:buNone/>
-              <a:defRPr sz="3200">
+              <a:defRPr sz="2400">
+                <a:solidFill>
+                  <a:schemeClr val="tx1"/>
+                </a:solidFill>
+              </a:defRPr>
+            </a:lvl1pPr>
+            <a:lvl2pPr marL="457200" indent="0">
+              <a:buNone/>
+              <a:defRPr sz="2000">
                 <a:solidFill>
                   <a:schemeClr val="tx1">
                     <a:tint val="75000"/>
                   </a:schemeClr>
                 </a:solidFill>
               </a:defRPr>
-            </a:lvl1pPr>
-            <a:lvl2pPr marL="609585" indent="0">
-              <a:buNone/>
-              <a:defRPr sz="2667">
+            </a:lvl2pPr>
+            <a:lvl3pPr marL="914400" indent="0">
+              <a:buNone/>
+              <a:defRPr sz="1800">
                 <a:solidFill>
                   <a:schemeClr val="tx1">
                     <a:tint val="75000"/>
                   </a:schemeClr>
                 </a:solidFill>
               </a:defRPr>
-            </a:lvl2pPr>
-            <a:lvl3pPr marL="1219170" indent="0">
-              <a:buNone/>
-              <a:defRPr sz="2400">
+            </a:lvl3pPr>
+            <a:lvl4pPr marL="1371600" indent="0">
+              <a:buNone/>
+              <a:defRPr sz="1600">
                 <a:solidFill>
                   <a:schemeClr val="tx1">
                     <a:tint val="75000"/>
                   </a:schemeClr>
                 </a:solidFill>
               </a:defRPr>
-            </a:lvl3pPr>
-            <a:lvl4pPr marL="1828754" indent="0">
-              <a:buNone/>
-              <a:defRPr sz="2133">
+            </a:lvl4pPr>
+            <a:lvl5pPr marL="1828800" indent="0">
+              <a:buNone/>
+              <a:defRPr sz="1600">
                 <a:solidFill>
                   <a:schemeClr val="tx1">
                     <a:tint val="75000"/>
                   </a:schemeClr>
                 </a:solidFill>
               </a:defRPr>
-            </a:lvl4pPr>
-            <a:lvl5pPr marL="2438339" indent="0">
-              <a:buNone/>
-              <a:defRPr sz="2133">
+            </a:lvl5pPr>
+            <a:lvl6pPr marL="2286000" indent="0">
+              <a:buNone/>
+              <a:defRPr sz="1600">
                 <a:solidFill>
                   <a:schemeClr val="tx1">
                     <a:tint val="75000"/>
                   </a:schemeClr>
                 </a:solidFill>
               </a:defRPr>
-            </a:lvl5pPr>
-            <a:lvl6pPr marL="3047924" indent="0">
-              <a:buNone/>
-              <a:defRPr sz="2133">
+            </a:lvl6pPr>
+            <a:lvl7pPr marL="2743200" indent="0">
+              <a:buNone/>
+              <a:defRPr sz="1600">
                 <a:solidFill>
                   <a:schemeClr val="tx1">
                     <a:tint val="75000"/>
                   </a:schemeClr>
                 </a:solidFill>
               </a:defRPr>
-            </a:lvl6pPr>
-            <a:lvl7pPr marL="3657509" indent="0">
-              <a:buNone/>
-              <a:defRPr sz="2133">
+            </a:lvl7pPr>
+            <a:lvl8pPr marL="3200400" indent="0">
+              <a:buNone/>
+              <a:defRPr sz="1600">
                 <a:solidFill>
                   <a:schemeClr val="tx1">
                     <a:tint val="75000"/>
                   </a:schemeClr>
                 </a:solidFill>
               </a:defRPr>
-            </a:lvl7pPr>
-            <a:lvl8pPr marL="4267093" indent="0">
-              <a:buNone/>
-              <a:defRPr sz="2133">
+            </a:lvl8pPr>
+            <a:lvl9pPr marL="3657600" indent="0">
+              <a:buNone/>
+              <a:defRPr sz="1600">
                 <a:solidFill>
                   <a:schemeClr val="tx1">
                     <a:tint val="75000"/>
                   </a:schemeClr>
                 </a:solidFill>
               </a:defRPr>
-            </a:lvl8pPr>
-            <a:lvl9pPr marL="4876678" indent="0">
-              <a:buNone/>
-              <a:defRPr sz="2133">
-                <a:solidFill>
-                  <a:schemeClr val="tx1">
-                    <a:tint val="75000"/>
-                  </a:schemeClr>
-                </a:solidFill>
-              </a:defRPr>
             </a:lvl9pPr>
           </a:lstStyle>
           <a:p>
             <a:pPr lvl="0"/>
             <a:r>
-              <a:rPr lang="es-ES"/>
+              <a:rPr lang="es-MX"/>
               <a:t>Haga clic para modificar los estilos de texto del patrón</a:t>
             </a:r>
           </a:p>
@@ -1009,7 +1007,7 @@
           <a:p>
             <a:fld id="{664CB750-BDA0-4B3C-9407-BAF21E562682}" type="datetimeFigureOut">
               <a:rPr lang="es-MX" smtClean="0"/>
-              <a:t>09/06/2025</a:t>
+              <a:t>04.07.2025</a:t>
             </a:fld>
             <a:endParaRPr lang="es-MX"/>
           </a:p>
@@ -1060,7 +1058,7 @@
     </p:spTree>
     <p:extLst>
       <p:ext uri="{BB962C8B-B14F-4D97-AF65-F5344CB8AC3E}">
-        <p14:creationId xmlns:p14="http://schemas.microsoft.com/office/powerpoint/2010/main" val="3296132825"/>
+        <p14:creationId xmlns:p14="http://schemas.microsoft.com/office/powerpoint/2010/main" val="2753147664"/>
       </p:ext>
     </p:extLst>
   </p:cSld>
@@ -1103,8 +1101,8 @@
           <a:lstStyle/>
           <a:p>
             <a:r>
-              <a:rPr lang="es-ES"/>
-              <a:t>Haga clic para modificar el estilo de título del patrón</a:t>
+              <a:rPr lang="es-MX"/>
+              <a:t>Haz clic para modificar el estilo de título del patrón</a:t>
             </a:r>
             <a:endParaRPr lang="en-US" dirty="0"/>
           </a:p>
@@ -1122,8 +1120,8 @@
         </p:nvSpPr>
         <p:spPr>
           <a:xfrm>
-            <a:off x="1117600" y="2434167"/>
-            <a:ext cx="6908800" cy="5801784"/>
+            <a:off x="628650" y="1825625"/>
+            <a:ext cx="3886200" cy="4351338"/>
           </a:xfrm>
         </p:spPr>
         <p:txBody>
@@ -1132,35 +1130,35 @@
           <a:p>
             <a:pPr lvl="0"/>
             <a:r>
-              <a:rPr lang="es-ES"/>
+              <a:rPr lang="es-MX"/>
               <a:t>Haga clic para modificar los estilos de texto del patrón</a:t>
             </a:r>
           </a:p>
           <a:p>
             <a:pPr lvl="1"/>
             <a:r>
-              <a:rPr lang="es-ES"/>
+              <a:rPr lang="es-MX"/>
               <a:t>Segundo nivel</a:t>
             </a:r>
           </a:p>
           <a:p>
             <a:pPr lvl="2"/>
             <a:r>
-              <a:rPr lang="es-ES"/>
+              <a:rPr lang="es-MX"/>
               <a:t>Tercer nivel</a:t>
             </a:r>
           </a:p>
           <a:p>
             <a:pPr lvl="3"/>
             <a:r>
-              <a:rPr lang="es-ES"/>
+              <a:rPr lang="es-MX"/>
               <a:t>Cuarto nivel</a:t>
             </a:r>
           </a:p>
           <a:p>
             <a:pPr lvl="4"/>
             <a:r>
-              <a:rPr lang="es-ES"/>
+              <a:rPr lang="es-MX"/>
               <a:t>Quinto nivel</a:t>
             </a:r>
             <a:endParaRPr lang="en-US" dirty="0"/>
@@ -1179,8 +1177,8 @@
         </p:nvSpPr>
         <p:spPr>
           <a:xfrm>
-            <a:off x="8229600" y="2434167"/>
-            <a:ext cx="6908800" cy="5801784"/>
+            <a:off x="4629150" y="1825625"/>
+            <a:ext cx="3886200" cy="4351338"/>
           </a:xfrm>
         </p:spPr>
         <p:txBody>
@@ -1189,35 +1187,35 @@
           <a:p>
             <a:pPr lvl="0"/>
             <a:r>
-              <a:rPr lang="es-ES"/>
+              <a:rPr lang="es-MX"/>
               <a:t>Haga clic para modificar los estilos de texto del patrón</a:t>
             </a:r>
           </a:p>
           <a:p>
             <a:pPr lvl="1"/>
             <a:r>
-              <a:rPr lang="es-ES"/>
+              <a:rPr lang="es-MX"/>
               <a:t>Segundo nivel</a:t>
             </a:r>
           </a:p>
           <a:p>
             <a:pPr lvl="2"/>
             <a:r>
-              <a:rPr lang="es-ES"/>
+              <a:rPr lang="es-MX"/>
               <a:t>Tercer nivel</a:t>
             </a:r>
           </a:p>
           <a:p>
             <a:pPr lvl="3"/>
             <a:r>
-              <a:rPr lang="es-ES"/>
+              <a:rPr lang="es-MX"/>
               <a:t>Cuarto nivel</a:t>
             </a:r>
           </a:p>
           <a:p>
             <a:pPr lvl="4"/>
             <a:r>
-              <a:rPr lang="es-ES"/>
+              <a:rPr lang="es-MX"/>
               <a:t>Quinto nivel</a:t>
             </a:r>
             <a:endParaRPr lang="en-US" dirty="0"/>
@@ -1241,7 +1239,7 @@
           <a:p>
             <a:fld id="{664CB750-BDA0-4B3C-9407-BAF21E562682}" type="datetimeFigureOut">
               <a:rPr lang="es-MX" smtClean="0"/>
-              <a:t>09/06/2025</a:t>
+              <a:t>04.07.2025</a:t>
             </a:fld>
             <a:endParaRPr lang="es-MX"/>
           </a:p>
@@ -1292,7 +1290,7 @@
     </p:spTree>
     <p:extLst>
       <p:ext uri="{BB962C8B-B14F-4D97-AF65-F5344CB8AC3E}">
-        <p14:creationId xmlns:p14="http://schemas.microsoft.com/office/powerpoint/2010/main" val="2804742058"/>
+        <p14:creationId xmlns:p14="http://schemas.microsoft.com/office/powerpoint/2010/main" val="2328873577"/>
       </p:ext>
     </p:extLst>
   </p:cSld>
@@ -1331,8 +1329,8 @@
         </p:nvSpPr>
         <p:spPr>
           <a:xfrm>
-            <a:off x="1119717" y="486834"/>
-            <a:ext cx="14020800" cy="1767417"/>
+            <a:off x="629841" y="365126"/>
+            <a:ext cx="7886700" cy="1325563"/>
           </a:xfrm>
         </p:spPr>
         <p:txBody>
@@ -1340,8 +1338,8 @@
           <a:lstStyle/>
           <a:p>
             <a:r>
-              <a:rPr lang="es-ES"/>
-              <a:t>Haga clic para modificar el estilo de título del patrón</a:t>
+              <a:rPr lang="es-MX"/>
+              <a:t>Haz clic para modificar el estilo de título del patrón</a:t>
             </a:r>
             <a:endParaRPr lang="en-US" dirty="0"/>
           </a:p>
@@ -1359,8 +1357,8 @@
         </p:nvSpPr>
         <p:spPr>
           <a:xfrm>
-            <a:off x="1119718" y="2241551"/>
-            <a:ext cx="6877049" cy="1098549"/>
+            <a:off x="629842" y="1681163"/>
+            <a:ext cx="3868340" cy="823912"/>
           </a:xfrm>
         </p:spPr>
         <p:txBody>
@@ -1368,45 +1366,45 @@
           <a:lstStyle>
             <a:lvl1pPr marL="0" indent="0">
               <a:buNone/>
-              <a:defRPr sz="3200" b="1"/>
+              <a:defRPr sz="2400" b="1"/>
             </a:lvl1pPr>
-            <a:lvl2pPr marL="609585" indent="0">
-              <a:buNone/>
-              <a:defRPr sz="2667" b="1"/>
+            <a:lvl2pPr marL="457200" indent="0">
+              <a:buNone/>
+              <a:defRPr sz="2000" b="1"/>
             </a:lvl2pPr>
-            <a:lvl3pPr marL="1219170" indent="0">
-              <a:buNone/>
-              <a:defRPr sz="2400" b="1"/>
+            <a:lvl3pPr marL="914400" indent="0">
+              <a:buNone/>
+              <a:defRPr sz="1800" b="1"/>
             </a:lvl3pPr>
-            <a:lvl4pPr marL="1828754" indent="0">
-              <a:buNone/>
-              <a:defRPr sz="2133" b="1"/>
+            <a:lvl4pPr marL="1371600" indent="0">
+              <a:buNone/>
+              <a:defRPr sz="1600" b="1"/>
             </a:lvl4pPr>
-            <a:lvl5pPr marL="2438339" indent="0">
-              <a:buNone/>
-              <a:defRPr sz="2133" b="1"/>
+            <a:lvl5pPr marL="1828800" indent="0">
+              <a:buNone/>
+              <a:defRPr sz="1600" b="1"/>
             </a:lvl5pPr>
-            <a:lvl6pPr marL="3047924" indent="0">
-              <a:buNone/>
-              <a:defRPr sz="2133" b="1"/>
+            <a:lvl6pPr marL="2286000" indent="0">
+              <a:buNone/>
+              <a:defRPr sz="1600" b="1"/>
             </a:lvl6pPr>
-            <a:lvl7pPr marL="3657509" indent="0">
-              <a:buNone/>
-              <a:defRPr sz="2133" b="1"/>
+            <a:lvl7pPr marL="2743200" indent="0">
+              <a:buNone/>
+              <a:defRPr sz="1600" b="1"/>
             </a:lvl7pPr>
-            <a:lvl8pPr marL="4267093" indent="0">
-              <a:buNone/>
-              <a:defRPr sz="2133" b="1"/>
+            <a:lvl8pPr marL="3200400" indent="0">
+              <a:buNone/>
+              <a:defRPr sz="1600" b="1"/>
             </a:lvl8pPr>
-            <a:lvl9pPr marL="4876678" indent="0">
-              <a:buNone/>
-              <a:defRPr sz="2133" b="1"/>
+            <a:lvl9pPr marL="3657600" indent="0">
+              <a:buNone/>
+              <a:defRPr sz="1600" b="1"/>
             </a:lvl9pPr>
           </a:lstStyle>
           <a:p>
             <a:pPr lvl="0"/>
             <a:r>
-              <a:rPr lang="es-ES"/>
+              <a:rPr lang="es-MX"/>
               <a:t>Haga clic para modificar los estilos de texto del patrón</a:t>
             </a:r>
           </a:p>
@@ -1424,8 +1422,8 @@
         </p:nvSpPr>
         <p:spPr>
           <a:xfrm>
-            <a:off x="1119718" y="3340100"/>
-            <a:ext cx="6877049" cy="4912784"/>
+            <a:off x="629842" y="2505075"/>
+            <a:ext cx="3868340" cy="3684588"/>
           </a:xfrm>
         </p:spPr>
         <p:txBody>
@@ -1434,35 +1432,35 @@
           <a:p>
             <a:pPr lvl="0"/>
             <a:r>
-              <a:rPr lang="es-ES"/>
+              <a:rPr lang="es-MX"/>
               <a:t>Haga clic para modificar los estilos de texto del patrón</a:t>
             </a:r>
           </a:p>
           <a:p>
             <a:pPr lvl="1"/>
             <a:r>
-              <a:rPr lang="es-ES"/>
+              <a:rPr lang="es-MX"/>
               <a:t>Segundo nivel</a:t>
             </a:r>
           </a:p>
           <a:p>
             <a:pPr lvl="2"/>
             <a:r>
-              <a:rPr lang="es-ES"/>
+              <a:rPr lang="es-MX"/>
               <a:t>Tercer nivel</a:t>
             </a:r>
           </a:p>
           <a:p>
             <a:pPr lvl="3"/>
             <a:r>
-              <a:rPr lang="es-ES"/>
+              <a:rPr lang="es-MX"/>
               <a:t>Cuarto nivel</a:t>
             </a:r>
           </a:p>
           <a:p>
             <a:pPr lvl="4"/>
             <a:r>
-              <a:rPr lang="es-ES"/>
+              <a:rPr lang="es-MX"/>
               <a:t>Quinto nivel</a:t>
             </a:r>
             <a:endParaRPr lang="en-US" dirty="0"/>
@@ -1481,8 +1479,8 @@
         </p:nvSpPr>
         <p:spPr>
           <a:xfrm>
-            <a:off x="8229600" y="2241551"/>
-            <a:ext cx="6910917" cy="1098549"/>
+            <a:off x="4629150" y="1681163"/>
+            <a:ext cx="3887391" cy="823912"/>
           </a:xfrm>
         </p:spPr>
         <p:txBody>
@@ -1490,45 +1488,45 @@
           <a:lstStyle>
             <a:lvl1pPr marL="0" indent="0">
               <a:buNone/>
-              <a:defRPr sz="3200" b="1"/>
+              <a:defRPr sz="2400" b="1"/>
             </a:lvl1pPr>
-            <a:lvl2pPr marL="609585" indent="0">
-              <a:buNone/>
-              <a:defRPr sz="2667" b="1"/>
+            <a:lvl2pPr marL="457200" indent="0">
+              <a:buNone/>
+              <a:defRPr sz="2000" b="1"/>
             </a:lvl2pPr>
-            <a:lvl3pPr marL="1219170" indent="0">
-              <a:buNone/>
-              <a:defRPr sz="2400" b="1"/>
+            <a:lvl3pPr marL="914400" indent="0">
+              <a:buNone/>
+              <a:defRPr sz="1800" b="1"/>
             </a:lvl3pPr>
-            <a:lvl4pPr marL="1828754" indent="0">
-              <a:buNone/>
-              <a:defRPr sz="2133" b="1"/>
+            <a:lvl4pPr marL="1371600" indent="0">
+              <a:buNone/>
+              <a:defRPr sz="1600" b="1"/>
             </a:lvl4pPr>
-            <a:lvl5pPr marL="2438339" indent="0">
-              <a:buNone/>
-              <a:defRPr sz="2133" b="1"/>
+            <a:lvl5pPr marL="1828800" indent="0">
+              <a:buNone/>
+              <a:defRPr sz="1600" b="1"/>
             </a:lvl5pPr>
-            <a:lvl6pPr marL="3047924" indent="0">
-              <a:buNone/>
-              <a:defRPr sz="2133" b="1"/>
+            <a:lvl6pPr marL="2286000" indent="0">
+              <a:buNone/>
+              <a:defRPr sz="1600" b="1"/>
             </a:lvl6pPr>
-            <a:lvl7pPr marL="3657509" indent="0">
-              <a:buNone/>
-              <a:defRPr sz="2133" b="1"/>
+            <a:lvl7pPr marL="2743200" indent="0">
+              <a:buNone/>
+              <a:defRPr sz="1600" b="1"/>
             </a:lvl7pPr>
-            <a:lvl8pPr marL="4267093" indent="0">
-              <a:buNone/>
-              <a:defRPr sz="2133" b="1"/>
+            <a:lvl8pPr marL="3200400" indent="0">
+              <a:buNone/>
+              <a:defRPr sz="1600" b="1"/>
             </a:lvl8pPr>
-            <a:lvl9pPr marL="4876678" indent="0">
-              <a:buNone/>
-              <a:defRPr sz="2133" b="1"/>
+            <a:lvl9pPr marL="3657600" indent="0">
+              <a:buNone/>
+              <a:defRPr sz="1600" b="1"/>
             </a:lvl9pPr>
           </a:lstStyle>
           <a:p>
             <a:pPr lvl="0"/>
             <a:r>
-              <a:rPr lang="es-ES"/>
+              <a:rPr lang="es-MX"/>
               <a:t>Haga clic para modificar los estilos de texto del patrón</a:t>
             </a:r>
           </a:p>
@@ -1546,8 +1544,8 @@
         </p:nvSpPr>
         <p:spPr>
           <a:xfrm>
-            <a:off x="8229600" y="3340100"/>
-            <a:ext cx="6910917" cy="4912784"/>
+            <a:off x="4629150" y="2505075"/>
+            <a:ext cx="3887391" cy="3684588"/>
           </a:xfrm>
         </p:spPr>
         <p:txBody>
@@ -1556,35 +1554,35 @@
           <a:p>
             <a:pPr lvl="0"/>
             <a:r>
-              <a:rPr lang="es-ES"/>
+              <a:rPr lang="es-MX"/>
               <a:t>Haga clic para modificar los estilos de texto del patrón</a:t>
             </a:r>
           </a:p>
           <a:p>
             <a:pPr lvl="1"/>
             <a:r>
-              <a:rPr lang="es-ES"/>
+              <a:rPr lang="es-MX"/>
               <a:t>Segundo nivel</a:t>
             </a:r>
           </a:p>
           <a:p>
             <a:pPr lvl="2"/>
             <a:r>
-              <a:rPr lang="es-ES"/>
+              <a:rPr lang="es-MX"/>
               <a:t>Tercer nivel</a:t>
             </a:r>
           </a:p>
           <a:p>
             <a:pPr lvl="3"/>
             <a:r>
-              <a:rPr lang="es-ES"/>
+              <a:rPr lang="es-MX"/>
               <a:t>Cuarto nivel</a:t>
             </a:r>
           </a:p>
           <a:p>
             <a:pPr lvl="4"/>
             <a:r>
-              <a:rPr lang="es-ES"/>
+              <a:rPr lang="es-MX"/>
               <a:t>Quinto nivel</a:t>
             </a:r>
             <a:endParaRPr lang="en-US" dirty="0"/>
@@ -1608,7 +1606,7 @@
           <a:p>
             <a:fld id="{664CB750-BDA0-4B3C-9407-BAF21E562682}" type="datetimeFigureOut">
               <a:rPr lang="es-MX" smtClean="0"/>
-              <a:t>09/06/2025</a:t>
+              <a:t>04.07.2025</a:t>
             </a:fld>
             <a:endParaRPr lang="es-MX"/>
           </a:p>
@@ -1659,7 +1657,7 @@
     </p:spTree>
     <p:extLst>
       <p:ext uri="{BB962C8B-B14F-4D97-AF65-F5344CB8AC3E}">
-        <p14:creationId xmlns:p14="http://schemas.microsoft.com/office/powerpoint/2010/main" val="1287047277"/>
+        <p14:creationId xmlns:p14="http://schemas.microsoft.com/office/powerpoint/2010/main" val="883584028"/>
       </p:ext>
     </p:extLst>
   </p:cSld>
@@ -1702,8 +1700,8 @@
           <a:lstStyle/>
           <a:p>
             <a:r>
-              <a:rPr lang="es-ES"/>
-              <a:t>Haga clic para modificar el estilo de título del patrón</a:t>
+              <a:rPr lang="es-MX"/>
+              <a:t>Haz clic para modificar el estilo de título del patrón</a:t>
             </a:r>
             <a:endParaRPr lang="en-US" dirty="0"/>
           </a:p>
@@ -1726,7 +1724,7 @@
           <a:p>
             <a:fld id="{664CB750-BDA0-4B3C-9407-BAF21E562682}" type="datetimeFigureOut">
               <a:rPr lang="es-MX" smtClean="0"/>
-              <a:t>09/06/2025</a:t>
+              <a:t>04.07.2025</a:t>
             </a:fld>
             <a:endParaRPr lang="es-MX"/>
           </a:p>
@@ -1777,7 +1775,7 @@
     </p:spTree>
     <p:extLst>
       <p:ext uri="{BB962C8B-B14F-4D97-AF65-F5344CB8AC3E}">
-        <p14:creationId xmlns:p14="http://schemas.microsoft.com/office/powerpoint/2010/main" val="2582222667"/>
+        <p14:creationId xmlns:p14="http://schemas.microsoft.com/office/powerpoint/2010/main" val="2761139022"/>
       </p:ext>
     </p:extLst>
   </p:cSld>
@@ -1821,7 +1819,7 @@
           <a:p>
             <a:fld id="{664CB750-BDA0-4B3C-9407-BAF21E562682}" type="datetimeFigureOut">
               <a:rPr lang="es-MX" smtClean="0"/>
-              <a:t>09/06/2025</a:t>
+              <a:t>04.07.2025</a:t>
             </a:fld>
             <a:endParaRPr lang="es-MX"/>
           </a:p>
@@ -1872,7 +1870,7 @@
     </p:spTree>
     <p:extLst>
       <p:ext uri="{BB962C8B-B14F-4D97-AF65-F5344CB8AC3E}">
-        <p14:creationId xmlns:p14="http://schemas.microsoft.com/office/powerpoint/2010/main" val="784089483"/>
+        <p14:creationId xmlns:p14="http://schemas.microsoft.com/office/powerpoint/2010/main" val="3246733308"/>
       </p:ext>
     </p:extLst>
   </p:cSld>
@@ -1911,21 +1909,21 @@
         </p:nvSpPr>
         <p:spPr>
           <a:xfrm>
-            <a:off x="1119718" y="609600"/>
-            <a:ext cx="5242983" cy="2133600"/>
+            <a:off x="629841" y="457200"/>
+            <a:ext cx="2949178" cy="1600200"/>
           </a:xfrm>
         </p:spPr>
         <p:txBody>
           <a:bodyPr anchor="b"/>
           <a:lstStyle>
             <a:lvl1pPr>
-              <a:defRPr sz="4267"/>
+              <a:defRPr sz="3200"/>
             </a:lvl1pPr>
           </a:lstStyle>
           <a:p>
             <a:r>
-              <a:rPr lang="es-ES"/>
-              <a:t>Haga clic para modificar el estilo de título del patrón</a:t>
+              <a:rPr lang="es-MX"/>
+              <a:t>Haz clic para modificar el estilo de título del patrón</a:t>
             </a:r>
             <a:endParaRPr lang="en-US" dirty="0"/>
           </a:p>
@@ -1943,73 +1941,73 @@
         </p:nvSpPr>
         <p:spPr>
           <a:xfrm>
-            <a:off x="6910917" y="1316567"/>
-            <a:ext cx="8229600" cy="6498167"/>
+            <a:off x="3887391" y="987426"/>
+            <a:ext cx="4629150" cy="4873625"/>
           </a:xfrm>
         </p:spPr>
         <p:txBody>
           <a:bodyPr/>
           <a:lstStyle>
             <a:lvl1pPr>
-              <a:defRPr sz="4267"/>
+              <a:defRPr sz="3200"/>
             </a:lvl1pPr>
             <a:lvl2pPr>
-              <a:defRPr sz="3733"/>
+              <a:defRPr sz="2800"/>
             </a:lvl2pPr>
             <a:lvl3pPr>
-              <a:defRPr sz="3200"/>
+              <a:defRPr sz="2400"/>
             </a:lvl3pPr>
             <a:lvl4pPr>
-              <a:defRPr sz="2667"/>
+              <a:defRPr sz="2000"/>
             </a:lvl4pPr>
             <a:lvl5pPr>
-              <a:defRPr sz="2667"/>
+              <a:defRPr sz="2000"/>
             </a:lvl5pPr>
             <a:lvl6pPr>
-              <a:defRPr sz="2667"/>
+              <a:defRPr sz="2000"/>
             </a:lvl6pPr>
             <a:lvl7pPr>
-              <a:defRPr sz="2667"/>
+              <a:defRPr sz="2000"/>
             </a:lvl7pPr>
             <a:lvl8pPr>
-              <a:defRPr sz="2667"/>
+              <a:defRPr sz="2000"/>
             </a:lvl8pPr>
             <a:lvl9pPr>
-              <a:defRPr sz="2667"/>
+              <a:defRPr sz="2000"/>
             </a:lvl9pPr>
           </a:lstStyle>
           <a:p>
             <a:pPr lvl="0"/>
             <a:r>
-              <a:rPr lang="es-ES"/>
+              <a:rPr lang="es-MX"/>
               <a:t>Haga clic para modificar los estilos de texto del patrón</a:t>
             </a:r>
           </a:p>
           <a:p>
             <a:pPr lvl="1"/>
             <a:r>
-              <a:rPr lang="es-ES"/>
+              <a:rPr lang="es-MX"/>
               <a:t>Segundo nivel</a:t>
             </a:r>
           </a:p>
           <a:p>
             <a:pPr lvl="2"/>
             <a:r>
-              <a:rPr lang="es-ES"/>
+              <a:rPr lang="es-MX"/>
               <a:t>Tercer nivel</a:t>
             </a:r>
           </a:p>
           <a:p>
             <a:pPr lvl="3"/>
             <a:r>
-              <a:rPr lang="es-ES"/>
+              <a:rPr lang="es-MX"/>
               <a:t>Cuarto nivel</a:t>
             </a:r>
           </a:p>
           <a:p>
             <a:pPr lvl="4"/>
             <a:r>
-              <a:rPr lang="es-ES"/>
+              <a:rPr lang="es-MX"/>
               <a:t>Quinto nivel</a:t>
             </a:r>
             <a:endParaRPr lang="en-US" dirty="0"/>
@@ -2028,8 +2026,8 @@
         </p:nvSpPr>
         <p:spPr>
           <a:xfrm>
-            <a:off x="1119718" y="2743200"/>
-            <a:ext cx="5242983" cy="5082117"/>
+            <a:off x="629841" y="2057400"/>
+            <a:ext cx="2949178" cy="3811588"/>
           </a:xfrm>
         </p:spPr>
         <p:txBody>
@@ -2037,45 +2035,45 @@
           <a:lstStyle>
             <a:lvl1pPr marL="0" indent="0">
               <a:buNone/>
-              <a:defRPr sz="2133"/>
+              <a:defRPr sz="1600"/>
             </a:lvl1pPr>
-            <a:lvl2pPr marL="609585" indent="0">
-              <a:buNone/>
-              <a:defRPr sz="1867"/>
+            <a:lvl2pPr marL="457200" indent="0">
+              <a:buNone/>
+              <a:defRPr sz="1400"/>
             </a:lvl2pPr>
-            <a:lvl3pPr marL="1219170" indent="0">
-              <a:buNone/>
-              <a:defRPr sz="1600"/>
+            <a:lvl3pPr marL="914400" indent="0">
+              <a:buNone/>
+              <a:defRPr sz="1200"/>
             </a:lvl3pPr>
-            <a:lvl4pPr marL="1828754" indent="0">
-              <a:buNone/>
-              <a:defRPr sz="1333"/>
+            <a:lvl4pPr marL="1371600" indent="0">
+              <a:buNone/>
+              <a:defRPr sz="1000"/>
             </a:lvl4pPr>
-            <a:lvl5pPr marL="2438339" indent="0">
-              <a:buNone/>
-              <a:defRPr sz="1333"/>
+            <a:lvl5pPr marL="1828800" indent="0">
+              <a:buNone/>
+              <a:defRPr sz="1000"/>
             </a:lvl5pPr>
-            <a:lvl6pPr marL="3047924" indent="0">
-              <a:buNone/>
-              <a:defRPr sz="1333"/>
+            <a:lvl6pPr marL="2286000" indent="0">
+              <a:buNone/>
+              <a:defRPr sz="1000"/>
             </a:lvl6pPr>
-            <a:lvl7pPr marL="3657509" indent="0">
-              <a:buNone/>
-              <a:defRPr sz="1333"/>
+            <a:lvl7pPr marL="2743200" indent="0">
+              <a:buNone/>
+              <a:defRPr sz="1000"/>
             </a:lvl7pPr>
-            <a:lvl8pPr marL="4267093" indent="0">
-              <a:buNone/>
-              <a:defRPr sz="1333"/>
+            <a:lvl8pPr marL="3200400" indent="0">
+              <a:buNone/>
+              <a:defRPr sz="1000"/>
             </a:lvl8pPr>
-            <a:lvl9pPr marL="4876678" indent="0">
-              <a:buNone/>
-              <a:defRPr sz="1333"/>
+            <a:lvl9pPr marL="3657600" indent="0">
+              <a:buNone/>
+              <a:defRPr sz="1000"/>
             </a:lvl9pPr>
           </a:lstStyle>
           <a:p>
             <a:pPr lvl="0"/>
             <a:r>
-              <a:rPr lang="es-ES"/>
+              <a:rPr lang="es-MX"/>
               <a:t>Haga clic para modificar los estilos de texto del patrón</a:t>
             </a:r>
           </a:p>
@@ -2098,7 +2096,7 @@
           <a:p>
             <a:fld id="{664CB750-BDA0-4B3C-9407-BAF21E562682}" type="datetimeFigureOut">
               <a:rPr lang="es-MX" smtClean="0"/>
-              <a:t>09/06/2025</a:t>
+              <a:t>04.07.2025</a:t>
             </a:fld>
             <a:endParaRPr lang="es-MX"/>
           </a:p>
@@ -2149,7 +2147,7 @@
     </p:spTree>
     <p:extLst>
       <p:ext uri="{BB962C8B-B14F-4D97-AF65-F5344CB8AC3E}">
-        <p14:creationId xmlns:p14="http://schemas.microsoft.com/office/powerpoint/2010/main" val="1223323495"/>
+        <p14:creationId xmlns:p14="http://schemas.microsoft.com/office/powerpoint/2010/main" val="1910257672"/>
       </p:ext>
     </p:extLst>
   </p:cSld>
@@ -2188,21 +2186,21 @@
         </p:nvSpPr>
         <p:spPr>
           <a:xfrm>
-            <a:off x="1119718" y="609600"/>
-            <a:ext cx="5242983" cy="2133600"/>
+            <a:off x="629841" y="457200"/>
+            <a:ext cx="2949178" cy="1600200"/>
           </a:xfrm>
         </p:spPr>
         <p:txBody>
           <a:bodyPr anchor="b"/>
           <a:lstStyle>
             <a:lvl1pPr>
-              <a:defRPr sz="4267"/>
+              <a:defRPr sz="3200"/>
             </a:lvl1pPr>
           </a:lstStyle>
           <a:p>
             <a:r>
-              <a:rPr lang="es-ES"/>
-              <a:t>Haga clic para modificar el estilo de título del patrón</a:t>
+              <a:rPr lang="es-MX"/>
+              <a:t>Haz clic para modificar el estilo de título del patrón</a:t>
             </a:r>
             <a:endParaRPr lang="en-US" dirty="0"/>
           </a:p>
@@ -2220,8 +2218,8 @@
         </p:nvSpPr>
         <p:spPr>
           <a:xfrm>
-            <a:off x="6910917" y="1316567"/>
-            <a:ext cx="8229600" cy="6498167"/>
+            <a:off x="3887391" y="987426"/>
+            <a:ext cx="4629150" cy="4873625"/>
           </a:xfrm>
         </p:spPr>
         <p:txBody>
@@ -2229,45 +2227,45 @@
           <a:lstStyle>
             <a:lvl1pPr marL="0" indent="0">
               <a:buNone/>
-              <a:defRPr sz="4267"/>
+              <a:defRPr sz="3200"/>
             </a:lvl1pPr>
-            <a:lvl2pPr marL="609585" indent="0">
-              <a:buNone/>
-              <a:defRPr sz="3733"/>
+            <a:lvl2pPr marL="457200" indent="0">
+              <a:buNone/>
+              <a:defRPr sz="2800"/>
             </a:lvl2pPr>
-            <a:lvl3pPr marL="1219170" indent="0">
-              <a:buNone/>
-              <a:defRPr sz="3200"/>
+            <a:lvl3pPr marL="914400" indent="0">
+              <a:buNone/>
+              <a:defRPr sz="2400"/>
             </a:lvl3pPr>
-            <a:lvl4pPr marL="1828754" indent="0">
-              <a:buNone/>
-              <a:defRPr sz="2667"/>
+            <a:lvl4pPr marL="1371600" indent="0">
+              <a:buNone/>
+              <a:defRPr sz="2000"/>
             </a:lvl4pPr>
-            <a:lvl5pPr marL="2438339" indent="0">
-              <a:buNone/>
-              <a:defRPr sz="2667"/>
+            <a:lvl5pPr marL="1828800" indent="0">
+              <a:buNone/>
+              <a:defRPr sz="2000"/>
             </a:lvl5pPr>
-            <a:lvl6pPr marL="3047924" indent="0">
-              <a:buNone/>
-              <a:defRPr sz="2667"/>
+            <a:lvl6pPr marL="2286000" indent="0">
+              <a:buNone/>
+              <a:defRPr sz="2000"/>
             </a:lvl6pPr>
-            <a:lvl7pPr marL="3657509" indent="0">
-              <a:buNone/>
-              <a:defRPr sz="2667"/>
+            <a:lvl7pPr marL="2743200" indent="0">
+              <a:buNone/>
+              <a:defRPr sz="2000"/>
             </a:lvl7pPr>
-            <a:lvl8pPr marL="4267093" indent="0">
-              <a:buNone/>
-              <a:defRPr sz="2667"/>
+            <a:lvl8pPr marL="3200400" indent="0">
+              <a:buNone/>
+              <a:defRPr sz="2000"/>
             </a:lvl8pPr>
-            <a:lvl9pPr marL="4876678" indent="0">
-              <a:buNone/>
-              <a:defRPr sz="2667"/>
+            <a:lvl9pPr marL="3657600" indent="0">
+              <a:buNone/>
+              <a:defRPr sz="2000"/>
             </a:lvl9pPr>
           </a:lstStyle>
           <a:p>
             <a:r>
-              <a:rPr lang="es-ES"/>
-              <a:t>Haga clic en el icono para agregar una imagen</a:t>
+              <a:rPr lang="es-MX"/>
+              <a:t>Haz clic en el icono para agregar una imagen</a:t>
             </a:r>
             <a:endParaRPr lang="en-US" dirty="0"/>
           </a:p>
@@ -2285,8 +2283,8 @@
         </p:nvSpPr>
         <p:spPr>
           <a:xfrm>
-            <a:off x="1119718" y="2743200"/>
-            <a:ext cx="5242983" cy="5082117"/>
+            <a:off x="629841" y="2057400"/>
+            <a:ext cx="2949178" cy="3811588"/>
           </a:xfrm>
         </p:spPr>
         <p:txBody>
@@ -2294,45 +2292,45 @@
           <a:lstStyle>
             <a:lvl1pPr marL="0" indent="0">
               <a:buNone/>
-              <a:defRPr sz="2133"/>
+              <a:defRPr sz="1600"/>
             </a:lvl1pPr>
-            <a:lvl2pPr marL="609585" indent="0">
-              <a:buNone/>
-              <a:defRPr sz="1867"/>
+            <a:lvl2pPr marL="457200" indent="0">
+              <a:buNone/>
+              <a:defRPr sz="1400"/>
             </a:lvl2pPr>
-            <a:lvl3pPr marL="1219170" indent="0">
-              <a:buNone/>
-              <a:defRPr sz="1600"/>
+            <a:lvl3pPr marL="914400" indent="0">
+              <a:buNone/>
+              <a:defRPr sz="1200"/>
             </a:lvl3pPr>
-            <a:lvl4pPr marL="1828754" indent="0">
-              <a:buNone/>
-              <a:defRPr sz="1333"/>
+            <a:lvl4pPr marL="1371600" indent="0">
+              <a:buNone/>
+              <a:defRPr sz="1000"/>
             </a:lvl4pPr>
-            <a:lvl5pPr marL="2438339" indent="0">
-              <a:buNone/>
-              <a:defRPr sz="1333"/>
+            <a:lvl5pPr marL="1828800" indent="0">
+              <a:buNone/>
+              <a:defRPr sz="1000"/>
             </a:lvl5pPr>
-            <a:lvl6pPr marL="3047924" indent="0">
-              <a:buNone/>
-              <a:defRPr sz="1333"/>
+            <a:lvl6pPr marL="2286000" indent="0">
+              <a:buNone/>
+              <a:defRPr sz="1000"/>
             </a:lvl6pPr>
-            <a:lvl7pPr marL="3657509" indent="0">
-              <a:buNone/>
-              <a:defRPr sz="1333"/>
+            <a:lvl7pPr marL="2743200" indent="0">
+              <a:buNone/>
+              <a:defRPr sz="1000"/>
             </a:lvl7pPr>
-            <a:lvl8pPr marL="4267093" indent="0">
-              <a:buNone/>
-              <a:defRPr sz="1333"/>
+            <a:lvl8pPr marL="3200400" indent="0">
+              <a:buNone/>
+              <a:defRPr sz="1000"/>
             </a:lvl8pPr>
-            <a:lvl9pPr marL="4876678" indent="0">
-              <a:buNone/>
-              <a:defRPr sz="1333"/>
+            <a:lvl9pPr marL="3657600" indent="0">
+              <a:buNone/>
+              <a:defRPr sz="1000"/>
             </a:lvl9pPr>
           </a:lstStyle>
           <a:p>
             <a:pPr lvl="0"/>
             <a:r>
-              <a:rPr lang="es-ES"/>
+              <a:rPr lang="es-MX"/>
               <a:t>Haga clic para modificar los estilos de texto del patrón</a:t>
             </a:r>
           </a:p>
@@ -2355,7 +2353,7 @@
           <a:p>
             <a:fld id="{664CB750-BDA0-4B3C-9407-BAF21E562682}" type="datetimeFigureOut">
               <a:rPr lang="es-MX" smtClean="0"/>
-              <a:t>09/06/2025</a:t>
+              <a:t>04.07.2025</a:t>
             </a:fld>
             <a:endParaRPr lang="es-MX"/>
           </a:p>
@@ -2406,7 +2404,7 @@
     </p:spTree>
     <p:extLst>
       <p:ext uri="{BB962C8B-B14F-4D97-AF65-F5344CB8AC3E}">
-        <p14:creationId xmlns:p14="http://schemas.microsoft.com/office/powerpoint/2010/main" val="3142040028"/>
+        <p14:creationId xmlns:p14="http://schemas.microsoft.com/office/powerpoint/2010/main" val="1110663080"/>
       </p:ext>
     </p:extLst>
   </p:cSld>
@@ -2450,8 +2448,8 @@
         </p:nvSpPr>
         <p:spPr>
           <a:xfrm>
-            <a:off x="1117600" y="486834"/>
-            <a:ext cx="14020800" cy="1767417"/>
+            <a:off x="628650" y="365126"/>
+            <a:ext cx="7886700" cy="1325563"/>
           </a:xfrm>
           <a:prstGeom prst="rect">
             <a:avLst/>
@@ -2464,8 +2462,8 @@
           <a:lstStyle/>
           <a:p>
             <a:r>
-              <a:rPr lang="es-ES"/>
-              <a:t>Haga clic para modificar el estilo de título del patrón</a:t>
+              <a:rPr lang="es-MX"/>
+              <a:t>Haz clic para modificar el estilo de título del patrón</a:t>
             </a:r>
             <a:endParaRPr lang="en-US" dirty="0"/>
           </a:p>
@@ -2483,8 +2481,8 @@
         </p:nvSpPr>
         <p:spPr>
           <a:xfrm>
-            <a:off x="1117600" y="2434167"/>
-            <a:ext cx="14020800" cy="5801784"/>
+            <a:off x="628650" y="1825625"/>
+            <a:ext cx="7886700" cy="4351338"/>
           </a:xfrm>
           <a:prstGeom prst="rect">
             <a:avLst/>
@@ -2498,35 +2496,35 @@
           <a:p>
             <a:pPr lvl="0"/>
             <a:r>
-              <a:rPr lang="es-ES"/>
+              <a:rPr lang="es-MX"/>
               <a:t>Haga clic para modificar los estilos de texto del patrón</a:t>
             </a:r>
           </a:p>
           <a:p>
             <a:pPr lvl="1"/>
             <a:r>
-              <a:rPr lang="es-ES"/>
+              <a:rPr lang="es-MX"/>
               <a:t>Segundo nivel</a:t>
             </a:r>
           </a:p>
           <a:p>
             <a:pPr lvl="2"/>
             <a:r>
-              <a:rPr lang="es-ES"/>
+              <a:rPr lang="es-MX"/>
               <a:t>Tercer nivel</a:t>
             </a:r>
           </a:p>
           <a:p>
             <a:pPr lvl="3"/>
             <a:r>
-              <a:rPr lang="es-ES"/>
+              <a:rPr lang="es-MX"/>
               <a:t>Cuarto nivel</a:t>
             </a:r>
           </a:p>
           <a:p>
             <a:pPr lvl="4"/>
             <a:r>
-              <a:rPr lang="es-ES"/>
+              <a:rPr lang="es-MX"/>
               <a:t>Quinto nivel</a:t>
             </a:r>
             <a:endParaRPr lang="en-US" dirty="0"/>
@@ -2545,8 +2543,8 @@
         </p:nvSpPr>
         <p:spPr>
           <a:xfrm>
-            <a:off x="1117600" y="8475134"/>
-            <a:ext cx="3657600" cy="486833"/>
+            <a:off x="628650" y="6356351"/>
+            <a:ext cx="2057400" cy="365125"/>
           </a:xfrm>
           <a:prstGeom prst="rect">
             <a:avLst/>
@@ -2556,7 +2554,7 @@
           <a:bodyPr vert="horz" lIns="91440" tIns="45720" rIns="91440" bIns="45720" rtlCol="0" anchor="ctr"/>
           <a:lstStyle>
             <a:lvl1pPr algn="l">
-              <a:defRPr sz="1600">
+              <a:defRPr sz="1200">
                 <a:solidFill>
                   <a:schemeClr val="tx1">
                     <a:tint val="75000"/>
@@ -2568,7 +2566,7 @@
           <a:p>
             <a:fld id="{664CB750-BDA0-4B3C-9407-BAF21E562682}" type="datetimeFigureOut">
               <a:rPr lang="es-MX" smtClean="0"/>
-              <a:t>09/06/2025</a:t>
+              <a:t>04.07.2025</a:t>
             </a:fld>
             <a:endParaRPr lang="es-MX"/>
           </a:p>
@@ -2586,8 +2584,8 @@
         </p:nvSpPr>
         <p:spPr>
           <a:xfrm>
-            <a:off x="5384800" y="8475134"/>
-            <a:ext cx="5486400" cy="486833"/>
+            <a:off x="3028950" y="6356351"/>
+            <a:ext cx="3086100" cy="365125"/>
           </a:xfrm>
           <a:prstGeom prst="rect">
             <a:avLst/>
@@ -2597,7 +2595,7 @@
           <a:bodyPr vert="horz" lIns="91440" tIns="45720" rIns="91440" bIns="45720" rtlCol="0" anchor="ctr"/>
           <a:lstStyle>
             <a:lvl1pPr algn="ctr">
-              <a:defRPr sz="1600">
+              <a:defRPr sz="1200">
                 <a:solidFill>
                   <a:schemeClr val="tx1">
                     <a:tint val="75000"/>
@@ -2623,8 +2621,8 @@
         </p:nvSpPr>
         <p:spPr>
           <a:xfrm>
-            <a:off x="11480800" y="8475134"/>
-            <a:ext cx="3657600" cy="486833"/>
+            <a:off x="6457950" y="6356351"/>
+            <a:ext cx="2057400" cy="365125"/>
           </a:xfrm>
           <a:prstGeom prst="rect">
             <a:avLst/>
@@ -2634,7 +2632,7 @@
           <a:bodyPr vert="horz" lIns="91440" tIns="45720" rIns="91440" bIns="45720" rtlCol="0" anchor="ctr"/>
           <a:lstStyle>
             <a:lvl1pPr algn="r">
-              <a:defRPr sz="1600">
+              <a:defRPr sz="1200">
                 <a:solidFill>
                   <a:schemeClr val="tx1">
                     <a:tint val="75000"/>
@@ -2655,7 +2653,7 @@
     </p:spTree>
     <p:extLst>
       <p:ext uri="{BB962C8B-B14F-4D97-AF65-F5344CB8AC3E}">
-        <p14:creationId xmlns:p14="http://schemas.microsoft.com/office/powerpoint/2010/main" val="3671997290"/>
+        <p14:creationId xmlns:p14="http://schemas.microsoft.com/office/powerpoint/2010/main" val="4238039368"/>
       </p:ext>
     </p:extLst>
   </p:cSld>
@@ -2675,7 +2673,7 @@
   </p:sldLayoutIdLst>
   <p:txStyles>
     <p:titleStyle>
-      <a:lvl1pPr algn="l" defTabSz="1219170" rtl="0" eaLnBrk="1" latinLnBrk="0" hangingPunct="1">
+      <a:lvl1pPr algn="l" defTabSz="914400" rtl="0" eaLnBrk="1" latinLnBrk="0" hangingPunct="1">
         <a:lnSpc>
           <a:spcPct val="90000"/>
         </a:lnSpc>
@@ -2683,7 +2681,7 @@
           <a:spcPct val="0"/>
         </a:spcBef>
         <a:buNone/>
-        <a:defRPr sz="5867" kern="1200">
+        <a:defRPr sz="4400" kern="1200">
           <a:solidFill>
             <a:schemeClr val="tx1"/>
           </a:solidFill>
@@ -2694,16 +2692,16 @@
       </a:lvl1pPr>
     </p:titleStyle>
     <p:bodyStyle>
-      <a:lvl1pPr marL="304792" indent="-304792" algn="l" defTabSz="1219170" rtl="0" eaLnBrk="1" latinLnBrk="0" hangingPunct="1">
+      <a:lvl1pPr marL="228600" indent="-228600" algn="l" defTabSz="914400" rtl="0" eaLnBrk="1" latinLnBrk="0" hangingPunct="1">
         <a:lnSpc>
           <a:spcPct val="90000"/>
         </a:lnSpc>
         <a:spcBef>
-          <a:spcPts val="1333"/>
+          <a:spcPts val="1000"/>
         </a:spcBef>
         <a:buFont typeface="Arial" panose="020B0604020202020204" pitchFamily="34" charset="0"/>
         <a:buChar char="•"/>
-        <a:defRPr sz="3733" kern="1200">
+        <a:defRPr sz="2800" kern="1200">
           <a:solidFill>
             <a:schemeClr val="tx1"/>
           </a:solidFill>
@@ -2712,48 +2710,12 @@
           <a:cs typeface="+mn-cs"/>
         </a:defRPr>
       </a:lvl1pPr>
-      <a:lvl2pPr marL="914377" indent="-304792" algn="l" defTabSz="1219170" rtl="0" eaLnBrk="1" latinLnBrk="0" hangingPunct="1">
+      <a:lvl2pPr marL="685800" indent="-228600" algn="l" defTabSz="914400" rtl="0" eaLnBrk="1" latinLnBrk="0" hangingPunct="1">
         <a:lnSpc>
           <a:spcPct val="90000"/>
         </a:lnSpc>
         <a:spcBef>
-          <a:spcPts val="667"/>
-        </a:spcBef>
-        <a:buFont typeface="Arial" panose="020B0604020202020204" pitchFamily="34" charset="0"/>
-        <a:buChar char="•"/>
-        <a:defRPr sz="3200" kern="1200">
-          <a:solidFill>
-            <a:schemeClr val="tx1"/>
-          </a:solidFill>
-          <a:latin typeface="+mn-lt"/>
-          <a:ea typeface="+mn-ea"/>
-          <a:cs typeface="+mn-cs"/>
-        </a:defRPr>
-      </a:lvl2pPr>
-      <a:lvl3pPr marL="1523962" indent="-304792" algn="l" defTabSz="1219170" rtl="0" eaLnBrk="1" latinLnBrk="0" hangingPunct="1">
-        <a:lnSpc>
-          <a:spcPct val="90000"/>
-        </a:lnSpc>
-        <a:spcBef>
-          <a:spcPts val="667"/>
-        </a:spcBef>
-        <a:buFont typeface="Arial" panose="020B0604020202020204" pitchFamily="34" charset="0"/>
-        <a:buChar char="•"/>
-        <a:defRPr sz="2667" kern="1200">
-          <a:solidFill>
-            <a:schemeClr val="tx1"/>
-          </a:solidFill>
-          <a:latin typeface="+mn-lt"/>
-          <a:ea typeface="+mn-ea"/>
-          <a:cs typeface="+mn-cs"/>
-        </a:defRPr>
-      </a:lvl3pPr>
-      <a:lvl4pPr marL="2133547" indent="-304792" algn="l" defTabSz="1219170" rtl="0" eaLnBrk="1" latinLnBrk="0" hangingPunct="1">
-        <a:lnSpc>
-          <a:spcPct val="90000"/>
-        </a:lnSpc>
-        <a:spcBef>
-          <a:spcPts val="667"/>
+          <a:spcPts val="500"/>
         </a:spcBef>
         <a:buFont typeface="Arial" panose="020B0604020202020204" pitchFamily="34" charset="0"/>
         <a:buChar char="•"/>
@@ -2765,17 +2727,53 @@
           <a:ea typeface="+mn-ea"/>
           <a:cs typeface="+mn-cs"/>
         </a:defRPr>
-      </a:lvl4pPr>
-      <a:lvl5pPr marL="2743131" indent="-304792" algn="l" defTabSz="1219170" rtl="0" eaLnBrk="1" latinLnBrk="0" hangingPunct="1">
+      </a:lvl2pPr>
+      <a:lvl3pPr marL="1143000" indent="-228600" algn="l" defTabSz="914400" rtl="0" eaLnBrk="1" latinLnBrk="0" hangingPunct="1">
         <a:lnSpc>
           <a:spcPct val="90000"/>
         </a:lnSpc>
         <a:spcBef>
-          <a:spcPts val="667"/>
+          <a:spcPts val="500"/>
         </a:spcBef>
         <a:buFont typeface="Arial" panose="020B0604020202020204" pitchFamily="34" charset="0"/>
         <a:buChar char="•"/>
-        <a:defRPr sz="2400" kern="1200">
+        <a:defRPr sz="2000" kern="1200">
+          <a:solidFill>
+            <a:schemeClr val="tx1"/>
+          </a:solidFill>
+          <a:latin typeface="+mn-lt"/>
+          <a:ea typeface="+mn-ea"/>
+          <a:cs typeface="+mn-cs"/>
+        </a:defRPr>
+      </a:lvl3pPr>
+      <a:lvl4pPr marL="1600200" indent="-228600" algn="l" defTabSz="914400" rtl="0" eaLnBrk="1" latinLnBrk="0" hangingPunct="1">
+        <a:lnSpc>
+          <a:spcPct val="90000"/>
+        </a:lnSpc>
+        <a:spcBef>
+          <a:spcPts val="500"/>
+        </a:spcBef>
+        <a:buFont typeface="Arial" panose="020B0604020202020204" pitchFamily="34" charset="0"/>
+        <a:buChar char="•"/>
+        <a:defRPr sz="1800" kern="1200">
+          <a:solidFill>
+            <a:schemeClr val="tx1"/>
+          </a:solidFill>
+          <a:latin typeface="+mn-lt"/>
+          <a:ea typeface="+mn-ea"/>
+          <a:cs typeface="+mn-cs"/>
+        </a:defRPr>
+      </a:lvl4pPr>
+      <a:lvl5pPr marL="2057400" indent="-228600" algn="l" defTabSz="914400" rtl="0" eaLnBrk="1" latinLnBrk="0" hangingPunct="1">
+        <a:lnSpc>
+          <a:spcPct val="90000"/>
+        </a:lnSpc>
+        <a:spcBef>
+          <a:spcPts val="500"/>
+        </a:spcBef>
+        <a:buFont typeface="Arial" panose="020B0604020202020204" pitchFamily="34" charset="0"/>
+        <a:buChar char="•"/>
+        <a:defRPr sz="1800" kern="1200">
           <a:solidFill>
             <a:schemeClr val="tx1"/>
           </a:solidFill>
@@ -2784,16 +2782,16 @@
           <a:cs typeface="+mn-cs"/>
         </a:defRPr>
       </a:lvl5pPr>
-      <a:lvl6pPr marL="3352716" indent="-304792" algn="l" defTabSz="1219170" rtl="0" eaLnBrk="1" latinLnBrk="0" hangingPunct="1">
+      <a:lvl6pPr marL="2514600" indent="-228600" algn="l" defTabSz="914400" rtl="0" eaLnBrk="1" latinLnBrk="0" hangingPunct="1">
         <a:lnSpc>
           <a:spcPct val="90000"/>
         </a:lnSpc>
         <a:spcBef>
-          <a:spcPts val="667"/>
+          <a:spcPts val="500"/>
         </a:spcBef>
         <a:buFont typeface="Arial" panose="020B0604020202020204" pitchFamily="34" charset="0"/>
         <a:buChar char="•"/>
-        <a:defRPr sz="2400" kern="1200">
+        <a:defRPr sz="1800" kern="1200">
           <a:solidFill>
             <a:schemeClr val="tx1"/>
           </a:solidFill>
@@ -2802,16 +2800,16 @@
           <a:cs typeface="+mn-cs"/>
         </a:defRPr>
       </a:lvl6pPr>
-      <a:lvl7pPr marL="3962301" indent="-304792" algn="l" defTabSz="1219170" rtl="0" eaLnBrk="1" latinLnBrk="0" hangingPunct="1">
+      <a:lvl7pPr marL="2971800" indent="-228600" algn="l" defTabSz="914400" rtl="0" eaLnBrk="1" latinLnBrk="0" hangingPunct="1">
         <a:lnSpc>
           <a:spcPct val="90000"/>
         </a:lnSpc>
         <a:spcBef>
-          <a:spcPts val="667"/>
+          <a:spcPts val="500"/>
         </a:spcBef>
         <a:buFont typeface="Arial" panose="020B0604020202020204" pitchFamily="34" charset="0"/>
         <a:buChar char="•"/>
-        <a:defRPr sz="2400" kern="1200">
+        <a:defRPr sz="1800" kern="1200">
           <a:solidFill>
             <a:schemeClr val="tx1"/>
           </a:solidFill>
@@ -2820,16 +2818,16 @@
           <a:cs typeface="+mn-cs"/>
         </a:defRPr>
       </a:lvl7pPr>
-      <a:lvl8pPr marL="4571886" indent="-304792" algn="l" defTabSz="1219170" rtl="0" eaLnBrk="1" latinLnBrk="0" hangingPunct="1">
+      <a:lvl8pPr marL="3429000" indent="-228600" algn="l" defTabSz="914400" rtl="0" eaLnBrk="1" latinLnBrk="0" hangingPunct="1">
         <a:lnSpc>
           <a:spcPct val="90000"/>
         </a:lnSpc>
         <a:spcBef>
-          <a:spcPts val="667"/>
+          <a:spcPts val="500"/>
         </a:spcBef>
         <a:buFont typeface="Arial" panose="020B0604020202020204" pitchFamily="34" charset="0"/>
         <a:buChar char="•"/>
-        <a:defRPr sz="2400" kern="1200">
+        <a:defRPr sz="1800" kern="1200">
           <a:solidFill>
             <a:schemeClr val="tx1"/>
           </a:solidFill>
@@ -2838,16 +2836,16 @@
           <a:cs typeface="+mn-cs"/>
         </a:defRPr>
       </a:lvl8pPr>
-      <a:lvl9pPr marL="5181470" indent="-304792" algn="l" defTabSz="1219170" rtl="0" eaLnBrk="1" latinLnBrk="0" hangingPunct="1">
+      <a:lvl9pPr marL="3886200" indent="-228600" algn="l" defTabSz="914400" rtl="0" eaLnBrk="1" latinLnBrk="0" hangingPunct="1">
         <a:lnSpc>
           <a:spcPct val="90000"/>
         </a:lnSpc>
         <a:spcBef>
-          <a:spcPts val="667"/>
+          <a:spcPts val="500"/>
         </a:spcBef>
         <a:buFont typeface="Arial" panose="020B0604020202020204" pitchFamily="34" charset="0"/>
         <a:buChar char="•"/>
-        <a:defRPr sz="2400" kern="1200">
+        <a:defRPr sz="1800" kern="1200">
           <a:solidFill>
             <a:schemeClr val="tx1"/>
           </a:solidFill>
@@ -2861,8 +2859,8 @@
       <a:defPPr>
         <a:defRPr lang="en-US"/>
       </a:defPPr>
-      <a:lvl1pPr marL="0" algn="l" defTabSz="1219170" rtl="0" eaLnBrk="1" latinLnBrk="0" hangingPunct="1">
-        <a:defRPr sz="2400" kern="1200">
+      <a:lvl1pPr marL="0" algn="l" defTabSz="914400" rtl="0" eaLnBrk="1" latinLnBrk="0" hangingPunct="1">
+        <a:defRPr sz="1800" kern="1200">
           <a:solidFill>
             <a:schemeClr val="tx1"/>
           </a:solidFill>
@@ -2871,8 +2869,8 @@
           <a:cs typeface="+mn-cs"/>
         </a:defRPr>
       </a:lvl1pPr>
-      <a:lvl2pPr marL="609585" algn="l" defTabSz="1219170" rtl="0" eaLnBrk="1" latinLnBrk="0" hangingPunct="1">
-        <a:defRPr sz="2400" kern="1200">
+      <a:lvl2pPr marL="457200" algn="l" defTabSz="914400" rtl="0" eaLnBrk="1" latinLnBrk="0" hangingPunct="1">
+        <a:defRPr sz="1800" kern="1200">
           <a:solidFill>
             <a:schemeClr val="tx1"/>
           </a:solidFill>
@@ -2881,8 +2879,8 @@
           <a:cs typeface="+mn-cs"/>
         </a:defRPr>
       </a:lvl2pPr>
-      <a:lvl3pPr marL="1219170" algn="l" defTabSz="1219170" rtl="0" eaLnBrk="1" latinLnBrk="0" hangingPunct="1">
-        <a:defRPr sz="2400" kern="1200">
+      <a:lvl3pPr marL="914400" algn="l" defTabSz="914400" rtl="0" eaLnBrk="1" latinLnBrk="0" hangingPunct="1">
+        <a:defRPr sz="1800" kern="1200">
           <a:solidFill>
             <a:schemeClr val="tx1"/>
           </a:solidFill>
@@ -2891,8 +2889,8 @@
           <a:cs typeface="+mn-cs"/>
         </a:defRPr>
       </a:lvl3pPr>
-      <a:lvl4pPr marL="1828754" algn="l" defTabSz="1219170" rtl="0" eaLnBrk="1" latinLnBrk="0" hangingPunct="1">
-        <a:defRPr sz="2400" kern="1200">
+      <a:lvl4pPr marL="1371600" algn="l" defTabSz="914400" rtl="0" eaLnBrk="1" latinLnBrk="0" hangingPunct="1">
+        <a:defRPr sz="1800" kern="1200">
           <a:solidFill>
             <a:schemeClr val="tx1"/>
           </a:solidFill>
@@ -2901,8 +2899,8 @@
           <a:cs typeface="+mn-cs"/>
         </a:defRPr>
       </a:lvl4pPr>
-      <a:lvl5pPr marL="2438339" algn="l" defTabSz="1219170" rtl="0" eaLnBrk="1" latinLnBrk="0" hangingPunct="1">
-        <a:defRPr sz="2400" kern="1200">
+      <a:lvl5pPr marL="1828800" algn="l" defTabSz="914400" rtl="0" eaLnBrk="1" latinLnBrk="0" hangingPunct="1">
+        <a:defRPr sz="1800" kern="1200">
           <a:solidFill>
             <a:schemeClr val="tx1"/>
           </a:solidFill>
@@ -2911,8 +2909,8 @@
           <a:cs typeface="+mn-cs"/>
         </a:defRPr>
       </a:lvl5pPr>
-      <a:lvl6pPr marL="3047924" algn="l" defTabSz="1219170" rtl="0" eaLnBrk="1" latinLnBrk="0" hangingPunct="1">
-        <a:defRPr sz="2400" kern="1200">
+      <a:lvl6pPr marL="2286000" algn="l" defTabSz="914400" rtl="0" eaLnBrk="1" latinLnBrk="0" hangingPunct="1">
+        <a:defRPr sz="1800" kern="1200">
           <a:solidFill>
             <a:schemeClr val="tx1"/>
           </a:solidFill>
@@ -2921,8 +2919,8 @@
           <a:cs typeface="+mn-cs"/>
         </a:defRPr>
       </a:lvl6pPr>
-      <a:lvl7pPr marL="3657509" algn="l" defTabSz="1219170" rtl="0" eaLnBrk="1" latinLnBrk="0" hangingPunct="1">
-        <a:defRPr sz="2400" kern="1200">
+      <a:lvl7pPr marL="2743200" algn="l" defTabSz="914400" rtl="0" eaLnBrk="1" latinLnBrk="0" hangingPunct="1">
+        <a:defRPr sz="1800" kern="1200">
           <a:solidFill>
             <a:schemeClr val="tx1"/>
           </a:solidFill>
@@ -2931,8 +2929,8 @@
           <a:cs typeface="+mn-cs"/>
         </a:defRPr>
       </a:lvl7pPr>
-      <a:lvl8pPr marL="4267093" algn="l" defTabSz="1219170" rtl="0" eaLnBrk="1" latinLnBrk="0" hangingPunct="1">
-        <a:defRPr sz="2400" kern="1200">
+      <a:lvl8pPr marL="3200400" algn="l" defTabSz="914400" rtl="0" eaLnBrk="1" latinLnBrk="0" hangingPunct="1">
+        <a:defRPr sz="1800" kern="1200">
           <a:solidFill>
             <a:schemeClr val="tx1"/>
           </a:solidFill>
@@ -2941,8 +2939,8 @@
           <a:cs typeface="+mn-cs"/>
         </a:defRPr>
       </a:lvl8pPr>
-      <a:lvl9pPr marL="4876678" algn="l" defTabSz="1219170" rtl="0" eaLnBrk="1" latinLnBrk="0" hangingPunct="1">
-        <a:defRPr sz="2400" kern="1200">
+      <a:lvl9pPr marL="3657600" algn="l" defTabSz="914400" rtl="0" eaLnBrk="1" latinLnBrk="0" hangingPunct="1">
+        <a:defRPr sz="1800" kern="1200">
           <a:solidFill>
             <a:schemeClr val="tx1"/>
           </a:solidFill>
@@ -2973,6 +2971,35 @@
           <a:chExt cx="0" cy="0"/>
         </a:xfrm>
       </p:grpSpPr>
+      <p:pic>
+        <p:nvPicPr>
+          <p:cNvPr id="16" name="Imagen 15">
+            <a:extLst>
+              <a:ext uri="{FF2B5EF4-FFF2-40B4-BE49-F238E27FC236}">
+                <a16:creationId xmlns:a16="http://schemas.microsoft.com/office/drawing/2014/main" id="{CE2FDB39-6F72-464D-8AB2-CD36D7E6D7FF}"/>
+              </a:ext>
+            </a:extLst>
+          </p:cNvPr>
+          <p:cNvPicPr>
+            <a:picLocks noChangeAspect="1"/>
+          </p:cNvPicPr>
+          <p:nvPr/>
+        </p:nvPicPr>
+        <p:blipFill rotWithShape="1">
+          <a:blip r:embed="rId2"/>
+          <a:srcRect l="27926" b="5321"/>
+          <a:stretch/>
+        </p:blipFill>
+        <p:spPr>
+          <a:xfrm>
+            <a:off x="194185" y="6268631"/>
+            <a:ext cx="8949816" cy="489245"/>
+          </a:xfrm>
+          <a:prstGeom prst="rect">
+            <a:avLst/>
+          </a:prstGeom>
+        </p:spPr>
+      </p:pic>
       <p:grpSp>
         <p:nvGrpSpPr>
           <p:cNvPr id="8" name="Grupo 7">
@@ -2987,8 +3014,8 @@
         </p:nvGrpSpPr>
         <p:grpSpPr>
           <a:xfrm>
-            <a:off x="211494" y="261026"/>
-            <a:ext cx="4105469" cy="8621948"/>
+            <a:off x="197201" y="195769"/>
+            <a:ext cx="2241200" cy="6466461"/>
             <a:chOff x="440430" y="261026"/>
             <a:chExt cx="2381885" cy="8621948"/>
           </a:xfrm>
@@ -3006,7 +3033,7 @@
             <p:nvPr/>
           </p:nvPicPr>
           <p:blipFill>
-            <a:blip r:embed="rId2">
+            <a:blip r:embed="rId3">
               <a:extLst>
                 <a:ext uri="{28A0092B-C50C-407E-A947-70E740481C1C}">
                   <a14:useLocalDpi xmlns:a14="http://schemas.microsoft.com/office/drawing/2010/main" val="0"/>
@@ -3040,7 +3067,7 @@
             <p:nvPr/>
           </p:nvPicPr>
           <p:blipFill>
-            <a:blip r:embed="rId2">
+            <a:blip r:embed="rId3">
               <a:extLst>
                 <a:ext uri="{28A0092B-C50C-407E-A947-70E740481C1C}">
                   <a14:useLocalDpi xmlns:a14="http://schemas.microsoft.com/office/drawing/2010/main" val="0"/>
@@ -3076,8 +3103,8 @@
         </p:nvSpPr>
         <p:spPr>
           <a:xfrm>
-            <a:off x="211493" y="3351126"/>
-            <a:ext cx="4105469" cy="2579809"/>
+            <a:off x="218688" y="2867903"/>
+            <a:ext cx="2219714" cy="2039917"/>
           </a:xfrm>
           <a:prstGeom prst="rect">
             <a:avLst/>
@@ -3090,14 +3117,14 @@
           </a:bodyPr>
           <a:lstStyle/>
           <a:p>
-            <a:pPr algn="ctr">
+            <a:pPr algn="ctr" defTabSz="685800">
               <a:lnSpc>
                 <a:spcPct val="150000"/>
               </a:lnSpc>
               <a:defRPr/>
             </a:pPr>
             <a:r>
-              <a:rPr lang="es-MX" sz="1400" b="1" dirty="0">
+              <a:rPr lang="es-MX" sz="1050" b="1" dirty="0">
                 <a:solidFill>
                   <a:schemeClr val="bg1"/>
                 </a:solidFill>
@@ -3107,14 +3134,14 @@
             </a:r>
           </a:p>
           <a:p>
-            <a:pPr algn="ctr">
+            <a:pPr algn="ctr" defTabSz="685800">
               <a:lnSpc>
                 <a:spcPct val="150000"/>
               </a:lnSpc>
               <a:defRPr/>
             </a:pPr>
             <a:r>
-              <a:rPr lang="es-MX" sz="1400" b="1" dirty="0">
+              <a:rPr lang="es-MX" sz="1050" b="1" dirty="0">
                 <a:solidFill>
                   <a:schemeClr val="bg1"/>
                 </a:solidFill>
@@ -3124,13 +3151,13 @@
             </a:r>
           </a:p>
           <a:p>
-            <a:pPr>
+            <a:pPr algn="ctr" defTabSz="685800">
               <a:lnSpc>
                 <a:spcPct val="150000"/>
               </a:lnSpc>
               <a:defRPr/>
             </a:pPr>
-            <a:endParaRPr lang="es-MX" sz="1400" dirty="0">
+            <a:endParaRPr lang="es-ES" sz="1050" b="1" dirty="0">
               <a:solidFill>
                 <a:schemeClr val="bg1"/>
               </a:solidFill>
@@ -3138,7 +3165,7 @@
             </a:endParaRPr>
           </a:p>
           <a:p>
-            <a:pPr marL="171450" indent="-171450">
+            <a:pPr marL="128588" indent="-128588">
               <a:lnSpc>
                 <a:spcPct val="150000"/>
               </a:lnSpc>
@@ -3147,32 +3174,26 @@
               <a:defRPr/>
             </a:pPr>
             <a:r>
-              <a:rPr lang="es-ES" sz="1400" b="1" dirty="0">
+              <a:rPr lang="es-MX" sz="1000" b="1" dirty="0">
                 <a:solidFill>
                   <a:schemeClr val="bg1"/>
                 </a:solidFill>
                 <a:latin typeface="Montserrat" pitchFamily="2" charset="0"/>
               </a:rPr>
-              <a:t>Maestría </a:t>
-            </a:r>
-            <a:r>
-              <a:rPr lang="es-ES" sz="1400" dirty="0">
+              <a:t>Doctorado</a:t>
+            </a:r>
+            <a:r>
+              <a:rPr lang="es-MX" sz="1000" dirty="0">
                 <a:solidFill>
                   <a:schemeClr val="bg1"/>
                 </a:solidFill>
                 <a:latin typeface="Montserrat" pitchFamily="2" charset="0"/>
               </a:rPr>
-              <a:t> en Seguridad Nacional.</a:t>
-            </a:r>
-            <a:endParaRPr lang="es-ES" sz="1400" b="1" dirty="0">
-              <a:solidFill>
-                <a:schemeClr val="bg1"/>
-              </a:solidFill>
-              <a:latin typeface="Montserrat" pitchFamily="2" charset="0"/>
-            </a:endParaRPr>
-          </a:p>
-          <a:p>
-            <a:pPr marL="171450" indent="-171450">
+              <a:t> en Derecho Judicial.</a:t>
+            </a:r>
+          </a:p>
+          <a:p>
+            <a:pPr marL="128588" indent="-128588">
               <a:lnSpc>
                 <a:spcPct val="150000"/>
               </a:lnSpc>
@@ -3180,53 +3201,7 @@
               <a:buChar char="§"/>
               <a:defRPr/>
             </a:pPr>
-            <a:r>
-              <a:rPr lang="es-MX" sz="1400" b="1" dirty="0">
-                <a:solidFill>
-                  <a:schemeClr val="bg1"/>
-                </a:solidFill>
-                <a:latin typeface="Montserrat" pitchFamily="2" charset="0"/>
-              </a:rPr>
-              <a:t>Licenciatura </a:t>
-            </a:r>
-            <a:r>
-              <a:rPr lang="es-MX" sz="1400" dirty="0">
-                <a:solidFill>
-                  <a:schemeClr val="bg1"/>
-                </a:solidFill>
-                <a:latin typeface="Montserrat" pitchFamily="2" charset="0"/>
-              </a:rPr>
-              <a:t>en  Derecho.</a:t>
-            </a:r>
-          </a:p>
-          <a:p>
-            <a:pPr marL="171450" indent="-171450">
-              <a:lnSpc>
-                <a:spcPct val="150000"/>
-              </a:lnSpc>
-              <a:buFont typeface="Arial" panose="020B0604020202020204" pitchFamily="34" charset="0"/>
-              <a:buChar char="•"/>
-              <a:defRPr/>
-            </a:pPr>
-            <a:r>
-              <a:rPr lang="es-MX" sz="1400" b="1" dirty="0">
-                <a:solidFill>
-                  <a:schemeClr val="bg1"/>
-                </a:solidFill>
-                <a:latin typeface="Montserrat" pitchFamily="2" charset="0"/>
-              </a:rPr>
-              <a:t>Licenciatura </a:t>
-            </a:r>
-            <a:r>
-              <a:rPr lang="es-MX" sz="1400" dirty="0">
-                <a:solidFill>
-                  <a:schemeClr val="bg1"/>
-                </a:solidFill>
-                <a:latin typeface="Montserrat" pitchFamily="2" charset="0"/>
-              </a:rPr>
-              <a:t>en Ciencias de la Comunicación.</a:t>
-            </a:r>
-            <a:endParaRPr lang="es-MX" sz="1100" b="1" dirty="0">
+            <a:endParaRPr lang="es-MX" sz="800" b="1" dirty="0">
               <a:solidFill>
                 <a:schemeClr val="bg1"/>
               </a:solidFill>
@@ -3234,18 +3209,76 @@
             </a:endParaRPr>
           </a:p>
           <a:p>
-            <a:pPr algn="ctr">
+            <a:pPr marL="128588" indent="-128588">
               <a:lnSpc>
                 <a:spcPct val="150000"/>
               </a:lnSpc>
+              <a:buFont typeface="Wingdings" panose="05000000000000000000" pitchFamily="2" charset="2"/>
+              <a:buChar char="§"/>
               <a:defRPr/>
             </a:pPr>
-            <a:endParaRPr lang="es-MX" sz="1100" b="1" dirty="0">
+            <a:r>
+              <a:rPr lang="es-MX" sz="1000" b="1" dirty="0">
+                <a:solidFill>
+                  <a:schemeClr val="bg1"/>
+                </a:solidFill>
+                <a:latin typeface="Montserrat" pitchFamily="2" charset="0"/>
+              </a:rPr>
+              <a:t>Maestría</a:t>
+            </a:r>
+            <a:r>
+              <a:rPr lang="es-MX" sz="1000" dirty="0">
+                <a:solidFill>
+                  <a:schemeClr val="bg1"/>
+                </a:solidFill>
+                <a:latin typeface="Montserrat" pitchFamily="2" charset="0"/>
+              </a:rPr>
+              <a:t> en Ciencias Penales.</a:t>
+            </a:r>
+          </a:p>
+          <a:p>
+            <a:pPr marL="128588" indent="-128588">
+              <a:lnSpc>
+                <a:spcPct val="150000"/>
+              </a:lnSpc>
+              <a:buFont typeface="Wingdings" panose="05000000000000000000" pitchFamily="2" charset="2"/>
+              <a:buChar char="§"/>
+              <a:defRPr/>
+            </a:pPr>
+            <a:endParaRPr lang="es-MX" sz="600" b="1" dirty="0">
               <a:solidFill>
                 <a:schemeClr val="bg1"/>
               </a:solidFill>
               <a:latin typeface="Montserrat" pitchFamily="2" charset="0"/>
             </a:endParaRPr>
+          </a:p>
+          <a:p>
+            <a:pPr marL="128588" indent="-128588" defTabSz="685800">
+              <a:lnSpc>
+                <a:spcPct val="150000"/>
+              </a:lnSpc>
+              <a:buFont typeface="Wingdings" panose="05000000000000000000" pitchFamily="2" charset="2"/>
+              <a:buChar char="§"/>
+              <a:defRPr/>
+            </a:pPr>
+            <a:r>
+              <a:rPr lang="es-MX" sz="1000" b="1" dirty="0">
+                <a:solidFill>
+                  <a:schemeClr val="bg1"/>
+                </a:solidFill>
+                <a:latin typeface="Montserrat" pitchFamily="2" charset="0"/>
+              </a:rPr>
+              <a:t>Licenciatura </a:t>
+            </a:r>
+            <a:r>
+              <a:rPr lang="es-MX" sz="1000" dirty="0">
+                <a:solidFill>
+                  <a:schemeClr val="bg1"/>
+                </a:solidFill>
+                <a:latin typeface="Montserrat" pitchFamily="2" charset="0"/>
+              </a:rPr>
+              <a:t>en  Derecho.</a:t>
+            </a:r>
           </a:p>
         </p:txBody>
       </p:sp>
@@ -3263,8 +3296,8 @@
         </p:nvSpPr>
         <p:spPr>
           <a:xfrm>
-            <a:off x="248565" y="6210239"/>
-            <a:ext cx="4068395" cy="2318070"/>
+            <a:off x="218687" y="5091011"/>
+            <a:ext cx="2219714" cy="1462836"/>
           </a:xfrm>
           <a:prstGeom prst="rect">
             <a:avLst/>
@@ -3277,14 +3310,14 @@
           </a:bodyPr>
           <a:lstStyle/>
           <a:p>
-            <a:pPr algn="ctr">
+            <a:pPr defTabSz="685800">
               <a:lnSpc>
                 <a:spcPct val="150000"/>
               </a:lnSpc>
               <a:defRPr/>
             </a:pPr>
             <a:r>
-              <a:rPr lang="es-MX" sz="1400" b="1" dirty="0">
+              <a:rPr lang="es-MX" sz="1050" b="1" dirty="0">
                 <a:solidFill>
                   <a:schemeClr val="bg1"/>
                 </a:solidFill>
@@ -3292,45 +3325,16 @@
               </a:rPr>
               <a:t>Información de Contacto</a:t>
             </a:r>
-          </a:p>
-          <a:p>
-            <a:pPr marL="171450" indent="-171450" algn="just">
-              <a:lnSpc>
-                <a:spcPct val="150000"/>
-              </a:lnSpc>
-              <a:buFont typeface="Wingdings 2" panose="05020102010507070707" pitchFamily="18" charset="2"/>
-              <a:buChar char="("/>
-            </a:pPr>
-            <a:r>
-              <a:rPr lang="es-MX" sz="1400" b="1" dirty="0">
-                <a:solidFill>
-                  <a:schemeClr val="bg1"/>
-                </a:solidFill>
-                <a:latin typeface="Montserrat" pitchFamily="2" charset="0"/>
-                <a:sym typeface="Wingdings"/>
-              </a:rPr>
-              <a:t>Personal: </a:t>
-            </a:r>
-          </a:p>
-          <a:p>
-            <a:pPr algn="just">
-              <a:lnSpc>
-                <a:spcPct val="150000"/>
-              </a:lnSpc>
-            </a:pPr>
-            <a:r>
-              <a:rPr lang="es-MX" sz="1400" dirty="0">
-                <a:solidFill>
-                  <a:schemeClr val="bg1"/>
-                </a:solidFill>
-                <a:latin typeface="Montserrat" pitchFamily="2" charset="0"/>
-                <a:sym typeface="Wingdings"/>
-              </a:rPr>
-              <a:t>5561666669</a:t>
-            </a:r>
-          </a:p>
-          <a:p>
-            <a:pPr marL="171450" indent="-171450" algn="just">
+            <a:endParaRPr lang="es-MX" sz="1050" dirty="0">
+              <a:solidFill>
+                <a:schemeClr val="bg1"/>
+              </a:solidFill>
+              <a:latin typeface="Montserrat" pitchFamily="2" charset="0"/>
+              <a:sym typeface="Wingdings"/>
+            </a:endParaRPr>
+          </a:p>
+          <a:p>
+            <a:pPr marL="128588" indent="-128588" algn="just">
               <a:lnSpc>
                 <a:spcPct val="150000"/>
               </a:lnSpc>
@@ -3338,7 +3342,7 @@
               <a:buChar char="("/>
             </a:pPr>
             <a:r>
-              <a:rPr lang="es-MX" sz="1400" b="1" dirty="0">
+              <a:rPr lang="es-MX" sz="1000" b="1" dirty="0">
                 <a:solidFill>
                   <a:schemeClr val="bg1"/>
                 </a:solidFill>
@@ -3355,42 +3359,40 @@
               </a:lnSpc>
             </a:pPr>
             <a:r>
-              <a:rPr lang="es-MX" sz="1400" dirty="0">
+              <a:rPr lang="es-MX" sz="1000" dirty="0">
                 <a:solidFill>
                   <a:schemeClr val="bg1"/>
                 </a:solidFill>
                 <a:latin typeface="Montserrat" pitchFamily="2" charset="0"/>
                 <a:sym typeface="Wingdings"/>
               </a:rPr>
-              <a:t>999 925 6388 ext. 8670201</a:t>
-            </a:r>
-          </a:p>
-          <a:p>
-            <a:pPr marL="171450" indent="-171450" algn="just">
+              <a:t>999 925 6388 ext. 8670201 </a:t>
+            </a:r>
+            <a:r>
+              <a:rPr lang="es-MX" sz="1000" b="1" dirty="0">
+                <a:solidFill>
+                  <a:schemeClr val="bg1"/>
+                </a:solidFill>
+                <a:latin typeface="Montserrat" pitchFamily="2" charset="0"/>
+                <a:sym typeface="Wingdings"/>
+              </a:rPr>
+              <a:t>Institucional:</a:t>
+            </a:r>
+          </a:p>
+          <a:p>
+            <a:pPr algn="just">
               <a:lnSpc>
                 <a:spcPct val="150000"/>
               </a:lnSpc>
-              <a:buFont typeface="Wingdings" pitchFamily="2" charset="2"/>
-              <a:buChar char="*"/>
             </a:pPr>
             <a:r>
-              <a:rPr lang="es-MX" sz="1400" b="1" dirty="0">
+              <a:rPr lang="es-MX" sz="1000" b="1" dirty="0">
                 <a:solidFill>
                   <a:schemeClr val="bg1"/>
                 </a:solidFill>
                 <a:latin typeface="Montserrat" pitchFamily="2" charset="0"/>
                 <a:sym typeface="Wingdings"/>
-              </a:rPr>
-              <a:t>Institucional: </a:t>
-            </a:r>
-            <a:r>
-              <a:rPr lang="es-MX" sz="1400" b="1" dirty="0">
-                <a:solidFill>
-                  <a:schemeClr val="bg1"/>
-                </a:solidFill>
-                <a:latin typeface="Montserrat" pitchFamily="2" charset="0"/>
-                <a:sym typeface="Wingdings"/>
-                <a:hlinkClick r:id="rId3">
+                <a:hlinkClick r:id="rId4">
                   <a:extLst>
                     <a:ext uri="{A12FA001-AC4F-418D-AE19-62706E023703}">
                       <ahyp:hlinkClr xmlns:ahyp="http://schemas.microsoft.com/office/drawing/2018/hyperlinkcolor" val="tx"/>
@@ -3398,9 +3400,9 @@
                   </a:extLst>
                 </a:hlinkClick>
               </a:rPr>
-              <a:t>smartinez@inami.gob.mx</a:t>
-            </a:r>
-            <a:endParaRPr lang="es-MX" sz="1400" b="1" dirty="0">
+              <a:t>lesperon@inami.gob.mx</a:t>
+            </a:r>
+            <a:endParaRPr lang="es-MX" sz="1000" b="1" dirty="0">
               <a:solidFill>
                 <a:schemeClr val="bg1"/>
               </a:solidFill>
@@ -3409,13 +3411,13 @@
             </a:endParaRPr>
           </a:p>
           <a:p>
-            <a:pPr>
+            <a:pPr defTabSz="685800">
               <a:lnSpc>
                 <a:spcPct val="150000"/>
               </a:lnSpc>
               <a:defRPr/>
             </a:pPr>
-            <a:endParaRPr lang="es-MX" sz="1400" b="1" dirty="0">
+            <a:endParaRPr lang="es-MX" sz="1050" b="1" dirty="0">
               <a:solidFill>
                 <a:schemeClr val="bg1"/>
               </a:solidFill>
@@ -3438,8 +3440,8 @@
         </p:nvSpPr>
         <p:spPr>
           <a:xfrm>
-            <a:off x="4354031" y="817521"/>
-            <a:ext cx="11833321" cy="7898957"/>
+            <a:off x="2438401" y="414542"/>
+            <a:ext cx="6705598" cy="6592574"/>
           </a:xfrm>
           <a:prstGeom prst="rect">
             <a:avLst/>
@@ -3460,13 +3462,13 @@
           </a:bodyPr>
           <a:lstStyle/>
           <a:p>
-            <a:pPr>
+            <a:pPr algn="just">
               <a:lnSpc>
                 <a:spcPct val="150000"/>
               </a:lnSpc>
             </a:pPr>
             <a:r>
-              <a:rPr lang="es-MX" sz="3600" b="1" dirty="0">
+              <a:rPr lang="es-MX" sz="2000" b="1" dirty="0">
                 <a:solidFill>
                   <a:srgbClr val="DEC9A7"/>
                 </a:solidFill>
@@ -3474,7 +3476,14 @@
               </a:rPr>
               <a:t>TRAYECTORIA INM</a:t>
             </a:r>
-            <a:endParaRPr lang="es-MX" sz="1400" b="1" dirty="0">
+          </a:p>
+          <a:p>
+            <a:pPr algn="just">
+              <a:lnSpc>
+                <a:spcPct val="150000"/>
+              </a:lnSpc>
+            </a:pPr>
+            <a:endParaRPr lang="es-MX" sz="400" b="1" dirty="0">
               <a:solidFill>
                 <a:srgbClr val="DEC9A7"/>
               </a:solidFill>
@@ -3482,22 +3491,22 @@
             </a:endParaRPr>
           </a:p>
           <a:p>
-            <a:pPr>
+            <a:pPr algn="just" defTabSz="685800">
               <a:lnSpc>
                 <a:spcPct val="150000"/>
               </a:lnSpc>
               <a:defRPr/>
             </a:pPr>
             <a:r>
-              <a:rPr lang="es-MX" sz="1600" b="1" dirty="0">
+              <a:rPr lang="es-MX" sz="1050" b="1" dirty="0">
                 <a:solidFill>
                   <a:srgbClr val="660033"/>
                 </a:solidFill>
                 <a:latin typeface="Montserrat" pitchFamily="2" charset="0"/>
               </a:rPr>
-              <a:t>Año de ingreso al INM: 2023</a:t>
-            </a:r>
-            <a:endParaRPr lang="es-MX" sz="2400" b="1" dirty="0">
+              <a:t>Año de ingreso al INM: 2025</a:t>
+            </a:r>
+            <a:endParaRPr lang="es-MX" sz="1200" b="1" dirty="0">
               <a:solidFill>
                 <a:srgbClr val="DEC9A7"/>
               </a:solidFill>
@@ -3505,7 +3514,7 @@
             </a:endParaRPr>
           </a:p>
           <a:p>
-            <a:pPr marL="171450" indent="-171450" algn="just">
+            <a:pPr marL="128588" indent="-128588" algn="just">
               <a:lnSpc>
                 <a:spcPct val="150000"/>
               </a:lnSpc>
@@ -3513,7 +3522,7 @@
               <a:buChar char="§"/>
             </a:pPr>
             <a:r>
-              <a:rPr lang="es-MX" sz="1600" b="1" dirty="0">
+              <a:rPr lang="es-MX" sz="1050" b="1" dirty="0">
                 <a:solidFill>
                   <a:srgbClr val="660033"/>
                 </a:solidFill>
@@ -3529,111 +3538,79 @@
               </a:lnSpc>
             </a:pPr>
             <a:r>
-              <a:rPr lang="es-MX" sz="1600" b="1" dirty="0">
+              <a:rPr lang="es-MX" sz="1050" b="1" dirty="0">
                 <a:solidFill>
                   <a:srgbClr val="660033"/>
                 </a:solidFill>
                 <a:latin typeface="Montserrat" pitchFamily="2" charset="0"/>
               </a:rPr>
-              <a:t>     1/03/2025 - a la fecha: </a:t>
-            </a:r>
-            <a:r>
-              <a:rPr lang="es-MX" sz="1600" dirty="0">
+              <a:t>     16/06/2025 - a la fecha: </a:t>
+            </a:r>
+            <a:r>
+              <a:rPr lang="es-MX" sz="1050" dirty="0">
                 <a:solidFill>
                   <a:srgbClr val="660033"/>
                 </a:solidFill>
                 <a:latin typeface="Montserrat" pitchFamily="2" charset="0"/>
               </a:rPr>
-              <a:t>Titular de la Oficina de Representación </a:t>
-            </a:r>
-          </a:p>
-          <a:p>
-            <a:pPr marL="171450" indent="-171450" algn="just">
-              <a:lnSpc>
-                <a:spcPct val="150000"/>
-              </a:lnSpc>
-              <a:buFont typeface="Wingdings" panose="05000000000000000000" pitchFamily="2" charset="2"/>
-              <a:buChar char="§"/>
-              <a:defRPr/>
-            </a:pPr>
-            <a:r>
-              <a:rPr lang="es-MX" sz="1600" b="1" dirty="0">
-                <a:solidFill>
-                  <a:srgbClr val="660033"/>
-                </a:solidFill>
-                <a:latin typeface="Montserrat" pitchFamily="2" charset="0"/>
-              </a:rPr>
-              <a:t>Oficina de Representación en el Estado de Hidalgo</a:t>
-            </a:r>
-          </a:p>
-          <a:p>
-            <a:pPr marL="180975" indent="-180975" algn="just">
+              <a:t>Titular de la Oficina de Representación.</a:t>
+            </a:r>
+          </a:p>
+          <a:p>
+            <a:pPr algn="just">
               <a:lnSpc>
                 <a:spcPct val="150000"/>
               </a:lnSpc>
             </a:pPr>
-            <a:r>
-              <a:rPr lang="es-MX" sz="1600" b="1" dirty="0">
-                <a:solidFill>
-                  <a:srgbClr val="660033"/>
+            <a:endParaRPr lang="es-MX" sz="100" b="1" dirty="0">
+              <a:solidFill>
+                <a:srgbClr val="DEC9A7"/>
+              </a:solidFill>
+              <a:latin typeface="Montserrat" pitchFamily="2" charset="0"/>
+            </a:endParaRPr>
+          </a:p>
+          <a:p>
+            <a:pPr algn="just" defTabSz="685800">
+              <a:lnSpc>
+                <a:spcPct val="150000"/>
+              </a:lnSpc>
+              <a:defRPr/>
+            </a:pPr>
+            <a:r>
+              <a:rPr lang="es-MX" sz="2000" b="1" dirty="0">
+                <a:solidFill>
+                  <a:srgbClr val="DEC9A7"/>
                 </a:solidFill>
                 <a:latin typeface="Montserrat" pitchFamily="2" charset="0"/>
               </a:rPr>
-              <a:t>     16/05/2024 – 28/02/2025:</a:t>
-            </a:r>
-            <a:r>
-              <a:rPr lang="es-MX" sz="1600" dirty="0">
+              <a:t>CARRERA PROFESIONAL</a:t>
+            </a:r>
+          </a:p>
+          <a:p>
+            <a:pPr algn="just">
+              <a:lnSpc>
+                <a:spcPct val="150000"/>
+              </a:lnSpc>
+            </a:pPr>
+            <a:r>
+              <a:rPr lang="es-MX" sz="1000" b="1" dirty="0">
                 <a:solidFill>
                   <a:srgbClr val="660033"/>
                 </a:solidFill>
                 <a:latin typeface="Montserrat" pitchFamily="2" charset="0"/>
               </a:rPr>
-              <a:t>Titular de la Oficina de  Representación.</a:t>
-            </a:r>
-          </a:p>
-          <a:p>
-            <a:pPr marL="180975" indent="-180975" algn="just">
+              <a:t>Cuenta con una trayectoria de más de 30 años en la Administración Pública, ocupando los siguientes cargos, entre otros:</a:t>
+            </a:r>
+          </a:p>
+          <a:p>
+            <a:pPr marL="128588" indent="-128588" algn="just">
               <a:lnSpc>
                 <a:spcPct val="150000"/>
               </a:lnSpc>
               <a:buFont typeface="Wingdings" panose="05000000000000000000" pitchFamily="2" charset="2"/>
               <a:buChar char="§"/>
             </a:pPr>
-            <a:r>
-              <a:rPr lang="es-MX" sz="1600" b="1" dirty="0">
-                <a:solidFill>
-                  <a:srgbClr val="660033"/>
-                </a:solidFill>
-                <a:latin typeface="Montserrat" pitchFamily="2" charset="0"/>
-              </a:rPr>
-              <a:t>Oficina de Representación en el Estado de Quintana Roo</a:t>
-            </a:r>
-          </a:p>
-          <a:p>
-            <a:pPr marL="180975" indent="-180975" algn="just">
-              <a:lnSpc>
-                <a:spcPct val="150000"/>
-              </a:lnSpc>
-            </a:pPr>
-            <a:r>
-              <a:rPr lang="es-MX" sz="1600" b="1" dirty="0">
-                <a:solidFill>
-                  <a:srgbClr val="660033"/>
-                </a:solidFill>
-                <a:latin typeface="Montserrat" pitchFamily="2" charset="0"/>
-              </a:rPr>
-              <a:t>      01/02/2023 - 15/05/2024: </a:t>
-            </a:r>
-            <a:r>
-              <a:rPr lang="es-MX" sz="1600" dirty="0">
-                <a:solidFill>
-                  <a:srgbClr val="660033"/>
-                </a:solidFill>
-                <a:latin typeface="Montserrat" pitchFamily="2" charset="0"/>
-              </a:rPr>
-              <a:t>Sub Representante Federal en Playa del  Carmen.</a:t>
-            </a:r>
-            <a:endParaRPr lang="es-MX" sz="1600" b="1" dirty="0">
+            <a:endParaRPr lang="es-MX" sz="700" b="1" dirty="0">
               <a:solidFill>
                 <a:srgbClr val="660033"/>
               </a:solidFill>
@@ -3641,60 +3618,7 @@
             </a:endParaRPr>
           </a:p>
           <a:p>
-            <a:pPr>
-              <a:lnSpc>
-                <a:spcPct val="150000"/>
-              </a:lnSpc>
-              <a:defRPr/>
-            </a:pPr>
-            <a:endParaRPr lang="es-MX" sz="1600" b="1" dirty="0">
-              <a:solidFill>
-                <a:srgbClr val="DEC9A7"/>
-              </a:solidFill>
-              <a:latin typeface="Montserrat" pitchFamily="2" charset="0"/>
-            </a:endParaRPr>
-          </a:p>
-          <a:p>
-            <a:pPr algn="just">
-              <a:lnSpc>
-                <a:spcPct val="150000"/>
-              </a:lnSpc>
-              <a:defRPr/>
-            </a:pPr>
-            <a:r>
-              <a:rPr lang="es-MX" sz="3200" b="1" dirty="0">
-                <a:solidFill>
-                  <a:srgbClr val="DEC9A7"/>
-                </a:solidFill>
-                <a:latin typeface="Montserrat" pitchFamily="2" charset="0"/>
-              </a:rPr>
-              <a:t>CARRERA PROFESIONAL</a:t>
-            </a:r>
-            <a:endParaRPr lang="es-MX" sz="1400" b="1" dirty="0">
-              <a:solidFill>
-                <a:srgbClr val="DEC9A7"/>
-              </a:solidFill>
-              <a:latin typeface="Montserrat" pitchFamily="2" charset="0"/>
-            </a:endParaRPr>
-          </a:p>
-          <a:p>
-            <a:pPr algn="just">
-              <a:lnSpc>
-                <a:spcPct val="150000"/>
-              </a:lnSpc>
-            </a:pPr>
-            <a:r>
-              <a:rPr lang="es-MX" sz="1600" b="1" dirty="0">
-                <a:solidFill>
-                  <a:srgbClr val="660033"/>
-                </a:solidFill>
-                <a:latin typeface="Montserrat" pitchFamily="2" charset="0"/>
-              </a:rPr>
-              <a:t>Cuenta con una trayectoria de más de 13 años en la Administración Pública, ocupando los siguientes cargos, entre otros:</a:t>
-            </a:r>
-          </a:p>
-          <a:p>
-            <a:pPr marL="171450" indent="-171450" algn="just">
+            <a:pPr marL="128588" indent="-128588" algn="just">
               <a:lnSpc>
                 <a:spcPct val="150000"/>
               </a:lnSpc>
@@ -3702,26 +3626,26 @@
               <a:buChar char="§"/>
             </a:pPr>
             <a:r>
-              <a:rPr lang="es-MX" sz="1600" b="1" dirty="0">
+              <a:rPr lang="es-MX" sz="1000" b="1" dirty="0">
                 <a:solidFill>
                   <a:srgbClr val="660033"/>
                 </a:solidFill>
                 <a:latin typeface="Montserrat" pitchFamily="2" charset="0"/>
               </a:rPr>
-              <a:t>Gobierno del Estado de Quintana Roo: </a:t>
-            </a:r>
-            <a:r>
-              <a:rPr lang="es-MX" sz="1600" dirty="0">
+              <a:t>Procuraduría General de Justicia en el Estado de Yucatán: </a:t>
+            </a:r>
+            <a:r>
+              <a:rPr lang="es-MX" sz="1000" dirty="0">
                 <a:solidFill>
                   <a:srgbClr val="660033"/>
                 </a:solidFill>
                 <a:latin typeface="Montserrat" pitchFamily="2" charset="0"/>
               </a:rPr>
-              <a:t>Director de Giras del Ejecutivo Estatal en Zona Norte/Subdirector de Giras y Eventos;</a:t>
-            </a:r>
-          </a:p>
-          <a:p>
-            <a:pPr marL="171450" indent="-171450" algn="just">
+              <a:t>Auxiliar Investigador.</a:t>
+            </a:r>
+          </a:p>
+          <a:p>
+            <a:pPr marL="128588" indent="-128588" algn="just">
               <a:lnSpc>
                 <a:spcPct val="150000"/>
               </a:lnSpc>
@@ -3729,26 +3653,26 @@
               <a:buChar char="§"/>
             </a:pPr>
             <a:r>
-              <a:rPr lang="es-MX" sz="1600" b="1" dirty="0">
+              <a:rPr lang="es-MX" sz="1000" b="1" dirty="0">
                 <a:solidFill>
                   <a:srgbClr val="660033"/>
                 </a:solidFill>
                 <a:latin typeface="Montserrat" pitchFamily="2" charset="0"/>
               </a:rPr>
-              <a:t>Procuraduría General de la República: </a:t>
-            </a:r>
-            <a:r>
-              <a:rPr lang="es-MX" sz="1600" dirty="0">
+              <a:t>Juzgado Séptimo de la Defensa Social en el Estado de Yucatán:</a:t>
+            </a:r>
+            <a:r>
+              <a:rPr lang="es-MX" sz="1000" dirty="0">
                 <a:solidFill>
                   <a:srgbClr val="660033"/>
                 </a:solidFill>
                 <a:latin typeface="Montserrat" pitchFamily="2" charset="0"/>
               </a:rPr>
-              <a:t>Director de Coordinación Interinstitucional/Secretario Particular del Titular  de la Coordinación de Planeación, Desarrollo e Innovación Institucional;</a:t>
-            </a:r>
-          </a:p>
-          <a:p>
-            <a:pPr marL="171450" indent="-171450" algn="just">
+              <a:t> Agente del Ministerio Público.</a:t>
+            </a:r>
+          </a:p>
+          <a:p>
+            <a:pPr marL="128588" indent="-128588" algn="just">
               <a:lnSpc>
                 <a:spcPct val="150000"/>
               </a:lnSpc>
@@ -3756,26 +3680,26 @@
               <a:buChar char="§"/>
             </a:pPr>
             <a:r>
-              <a:rPr lang="es-MX" sz="1600" b="1" dirty="0">
+              <a:rPr lang="es-MX" sz="1000" b="1" dirty="0">
                 <a:solidFill>
                   <a:srgbClr val="660033"/>
                 </a:solidFill>
                 <a:latin typeface="Montserrat" pitchFamily="2" charset="0"/>
               </a:rPr>
-              <a:t>Poder Judicial: </a:t>
-            </a:r>
-            <a:r>
-              <a:rPr lang="es-MX" sz="1600" dirty="0">
+              <a:t>Juzgado Sexto de la Defensa Social en el Estado de Yucatán:</a:t>
+            </a:r>
+            <a:r>
+              <a:rPr lang="es-MX" sz="1000" dirty="0">
                 <a:solidFill>
                   <a:srgbClr val="660033"/>
                 </a:solidFill>
                 <a:latin typeface="Montserrat" pitchFamily="2" charset="0"/>
               </a:rPr>
-              <a:t>Subdirector de Políticas de Seguridad y Normativa/Subdirector de Control Logístico en Mecanismos de Seguridad;</a:t>
-            </a:r>
-          </a:p>
-          <a:p>
-            <a:pPr marL="171450" indent="-171450" algn="just">
+              <a:t> Agente del Ministerio Público.</a:t>
+            </a:r>
+          </a:p>
+          <a:p>
+            <a:pPr marL="128588" indent="-128588" algn="just">
               <a:lnSpc>
                 <a:spcPct val="150000"/>
               </a:lnSpc>
@@ -3783,26 +3707,221 @@
               <a:buChar char="§"/>
             </a:pPr>
             <a:r>
-              <a:rPr lang="es-MX" sz="1600" b="1" dirty="0">
+              <a:rPr lang="es-MX" sz="1000" b="1" dirty="0">
                 <a:solidFill>
                   <a:srgbClr val="660033"/>
                 </a:solidFill>
                 <a:latin typeface="Montserrat" pitchFamily="2" charset="0"/>
               </a:rPr>
-              <a:t>Secretaría de Desarrollo Social: </a:t>
-            </a:r>
-            <a:r>
-              <a:rPr lang="es-MX" sz="1600" dirty="0">
+              <a:t>Procuraduría General de Justicia en el Estado de Yucatán  :</a:t>
+            </a:r>
+            <a:r>
+              <a:rPr lang="es-MX" sz="1000" dirty="0">
                 <a:solidFill>
                   <a:srgbClr val="660033"/>
                 </a:solidFill>
                 <a:latin typeface="Montserrat" pitchFamily="2" charset="0"/>
               </a:rPr>
-              <a:t>Subdirector de Planeación Estratégica.</a:t>
-            </a:r>
-            <a:endParaRPr lang="es-MX" b="1" dirty="0">
+              <a:t> Jefe de Departamento Jurídico de la Policía Judicial del Estado.</a:t>
+            </a:r>
+          </a:p>
+          <a:p>
+            <a:pPr marL="128588" indent="-128588" algn="just">
+              <a:lnSpc>
+                <a:spcPct val="150000"/>
+              </a:lnSpc>
+              <a:buFont typeface="Wingdings" panose="05000000000000000000" pitchFamily="2" charset="2"/>
+              <a:buChar char="§"/>
+            </a:pPr>
+            <a:r>
+              <a:rPr lang="es-MX" sz="1000" dirty="0">
+                <a:solidFill>
+                  <a:srgbClr val="660033"/>
+                </a:solidFill>
+                <a:latin typeface="Montserrat" pitchFamily="2" charset="0"/>
+              </a:rPr>
+              <a:t> </a:t>
+            </a:r>
+            <a:r>
+              <a:rPr lang="es-MX" sz="1000" b="1" dirty="0">
+                <a:solidFill>
+                  <a:srgbClr val="660033"/>
+                </a:solidFill>
+                <a:latin typeface="Montserrat" pitchFamily="2" charset="0"/>
+              </a:rPr>
+              <a:t>Ministerio Público en el Estado de Yucatán: </a:t>
+            </a:r>
+            <a:r>
+              <a:rPr lang="es-MX" sz="1000" dirty="0">
+                <a:solidFill>
+                  <a:srgbClr val="660033"/>
+                </a:solidFill>
+                <a:latin typeface="Montserrat" pitchFamily="2" charset="0"/>
+              </a:rPr>
+              <a:t>Jefe de Departamento y Coordinador de Agentes.</a:t>
+            </a:r>
+          </a:p>
+          <a:p>
+            <a:pPr marL="128588" indent="-128588" algn="just">
+              <a:lnSpc>
+                <a:spcPct val="150000"/>
+              </a:lnSpc>
+              <a:buFont typeface="Wingdings" panose="05000000000000000000" pitchFamily="2" charset="2"/>
+              <a:buChar char="§"/>
+            </a:pPr>
+            <a:r>
+              <a:rPr lang="es-MX" sz="1000" b="1" dirty="0">
+                <a:solidFill>
+                  <a:srgbClr val="660033"/>
+                </a:solidFill>
+                <a:latin typeface="Montserrat" pitchFamily="2" charset="0"/>
+              </a:rPr>
+              <a:t>Procuraduría General de Justicia en el Estado de Yucatán: </a:t>
+            </a:r>
+            <a:r>
+              <a:rPr lang="es-MX" sz="1000" dirty="0">
+                <a:solidFill>
+                  <a:srgbClr val="660033"/>
+                </a:solidFill>
+                <a:latin typeface="Montserrat" pitchFamily="2" charset="0"/>
+              </a:rPr>
+              <a:t>Director de Control de Procesos.</a:t>
+            </a:r>
+          </a:p>
+          <a:p>
+            <a:pPr marL="128588" indent="-128588" algn="just">
+              <a:lnSpc>
+                <a:spcPct val="150000"/>
+              </a:lnSpc>
+              <a:buFont typeface="Wingdings" panose="05000000000000000000" pitchFamily="2" charset="2"/>
+              <a:buChar char="§"/>
+            </a:pPr>
+            <a:r>
+              <a:rPr lang="es-MX" sz="1000" b="1" dirty="0">
+                <a:solidFill>
+                  <a:srgbClr val="660033"/>
+                </a:solidFill>
+                <a:latin typeface="Montserrat" pitchFamily="2" charset="0"/>
+              </a:rPr>
+              <a:t>Tribunal Superior de Justicia en el Estado de Yucatán: </a:t>
+            </a:r>
+            <a:r>
+              <a:rPr lang="es-MX" sz="1000" dirty="0">
+                <a:solidFill>
+                  <a:srgbClr val="660033"/>
+                </a:solidFill>
+                <a:latin typeface="Montserrat" pitchFamily="2" charset="0"/>
+              </a:rPr>
+              <a:t>Magistrado Primero de la Sala Especializada en Justicia para Adolescentes.</a:t>
+            </a:r>
+          </a:p>
+          <a:p>
+            <a:pPr marL="128588" indent="-128588" algn="just">
+              <a:lnSpc>
+                <a:spcPct val="150000"/>
+              </a:lnSpc>
+              <a:buFont typeface="Wingdings" panose="05000000000000000000" pitchFamily="2" charset="2"/>
+              <a:buChar char="§"/>
+            </a:pPr>
+            <a:r>
+              <a:rPr lang="es-MX" sz="1000" b="1" dirty="0">
+                <a:solidFill>
+                  <a:srgbClr val="660033"/>
+                </a:solidFill>
+                <a:latin typeface="Montserrat" pitchFamily="2" charset="0"/>
+              </a:rPr>
+              <a:t>Tribunal Superior de Justicia en el Estado de Yucatán: </a:t>
+            </a:r>
+            <a:r>
+              <a:rPr lang="es-MX" sz="1000" dirty="0">
+                <a:solidFill>
+                  <a:srgbClr val="660033"/>
+                </a:solidFill>
+                <a:latin typeface="Montserrat" pitchFamily="2" charset="0"/>
+              </a:rPr>
+              <a:t>Presidente de la Sala Especializada en Justicia para Adolescentes.</a:t>
+            </a:r>
+          </a:p>
+          <a:p>
+            <a:pPr marL="128588" indent="-128588" algn="just">
+              <a:lnSpc>
+                <a:spcPct val="150000"/>
+              </a:lnSpc>
+              <a:buFont typeface="Wingdings" panose="05000000000000000000" pitchFamily="2" charset="2"/>
+              <a:buChar char="§"/>
+            </a:pPr>
+            <a:r>
+              <a:rPr lang="es-MX" sz="1000" b="1" dirty="0">
+                <a:solidFill>
+                  <a:srgbClr val="660033"/>
+                </a:solidFill>
+                <a:latin typeface="Montserrat" pitchFamily="2" charset="0"/>
+              </a:rPr>
+              <a:t>Tribunal Superior de Justicia en el Estado de Yucatán: </a:t>
+            </a:r>
+            <a:r>
+              <a:rPr lang="es-MX" sz="1000" dirty="0">
+                <a:solidFill>
+                  <a:srgbClr val="660033"/>
+                </a:solidFill>
+                <a:latin typeface="Montserrat" pitchFamily="2" charset="0"/>
+              </a:rPr>
+              <a:t>Magistrado Segundo y Magistrado de la Primera Sala Colegiada del Sistema de Justicia Penal y Acusatorio de Ejecución de Sanciones y Medidas de Seguridad.</a:t>
+            </a:r>
+          </a:p>
+          <a:p>
+            <a:pPr marL="128588" indent="-128588" algn="just">
+              <a:lnSpc>
+                <a:spcPct val="150000"/>
+              </a:lnSpc>
+              <a:buFont typeface="Wingdings" panose="05000000000000000000" pitchFamily="2" charset="2"/>
+              <a:buChar char="§"/>
+            </a:pPr>
+            <a:r>
+              <a:rPr lang="es-MX" sz="1000" b="1" dirty="0">
+                <a:solidFill>
+                  <a:srgbClr val="660033"/>
+                </a:solidFill>
+                <a:latin typeface="Montserrat" pitchFamily="2" charset="0"/>
+              </a:rPr>
+              <a:t> Comisión Nacional de Tribunales Superiores de Justicia de los Estados Unidos Mexicanos: </a:t>
+            </a:r>
+            <a:r>
+              <a:rPr lang="es-MX" sz="1000" dirty="0">
+                <a:solidFill>
+                  <a:srgbClr val="660033"/>
+                </a:solidFill>
+                <a:latin typeface="Montserrat" pitchFamily="2" charset="0"/>
+              </a:rPr>
+              <a:t>Secretario Técnico.</a:t>
+            </a:r>
+          </a:p>
+          <a:p>
+            <a:pPr marL="128588" indent="-128588" algn="just">
+              <a:lnSpc>
+                <a:spcPct val="150000"/>
+              </a:lnSpc>
+              <a:buFont typeface="Wingdings" panose="05000000000000000000" pitchFamily="2" charset="2"/>
+              <a:buChar char="§"/>
+            </a:pPr>
+            <a:endParaRPr lang="es-MX" sz="800" dirty="0">
               <a:solidFill>
-                <a:srgbClr val="DEC9A7"/>
+                <a:srgbClr val="660033"/>
+              </a:solidFill>
+              <a:latin typeface="Montserrat" pitchFamily="2" charset="0"/>
+            </a:endParaRPr>
+          </a:p>
+          <a:p>
+            <a:pPr marL="128588" indent="-128588" algn="just">
+              <a:lnSpc>
+                <a:spcPct val="150000"/>
+              </a:lnSpc>
+              <a:buFont typeface="Wingdings" panose="05000000000000000000" pitchFamily="2" charset="2"/>
+              <a:buChar char="§"/>
+            </a:pPr>
+            <a:endParaRPr lang="es-MX" sz="800" dirty="0">
+              <a:solidFill>
+                <a:srgbClr val="660033"/>
               </a:solidFill>
               <a:latin typeface="Montserrat" pitchFamily="2" charset="0"/>
             </a:endParaRPr>
@@ -3824,7 +3943,7 @@
           <p:nvPr/>
         </p:nvPicPr>
         <p:blipFill rotWithShape="1">
-          <a:blip r:embed="rId4">
+          <a:blip r:embed="rId5">
             <a:extLst>
               <a:ext uri="{28A0092B-C50C-407E-A947-70E740481C1C}">
                 <a14:useLocalDpi xmlns:a14="http://schemas.microsoft.com/office/drawing/2010/main" val="0"/>
@@ -3836,8 +3955,8 @@
         </p:blipFill>
         <p:spPr>
           <a:xfrm>
-            <a:off x="10602393" y="46213"/>
-            <a:ext cx="5653608" cy="842973"/>
+            <a:off x="5446643" y="19964"/>
+            <a:ext cx="3697357" cy="551289"/>
           </a:xfrm>
           <a:prstGeom prst="rect">
             <a:avLst/>
@@ -3847,53 +3966,6 @@
           </a:ln>
         </p:spPr>
       </p:pic>
-      <p:pic>
-        <p:nvPicPr>
-          <p:cNvPr id="14" name="Picture 2" descr="W:\SDCO_Zona Sur\SUR\CV TITULARES DE LAS O R\SEMBLANZAS CURRICULARES TOR -JUNIO 2024\FOTOS\HIDALGO- SERGIO A MARTINEZ C. ARROYO.png">
-            <a:extLst>
-              <a:ext uri="{FF2B5EF4-FFF2-40B4-BE49-F238E27FC236}">
-                <a16:creationId xmlns:a16="http://schemas.microsoft.com/office/drawing/2014/main" id="{A0774E83-EAFD-4855-AF71-5102F43639B2}"/>
-              </a:ext>
-            </a:extLst>
-          </p:cNvPr>
-          <p:cNvPicPr>
-            <a:picLocks noChangeAspect="1" noChangeArrowheads="1"/>
-          </p:cNvPicPr>
-          <p:nvPr/>
-        </p:nvPicPr>
-        <p:blipFill>
-          <a:blip r:embed="rId5" cstate="print">
-            <a:extLst>
-              <a:ext uri="{28A0092B-C50C-407E-A947-70E740481C1C}">
-                <a14:useLocalDpi xmlns:a14="http://schemas.microsoft.com/office/drawing/2010/main" val="0"/>
-              </a:ext>
-            </a:extLst>
-          </a:blip>
-          <a:srcRect/>
-          <a:stretch>
-            <a:fillRect/>
-          </a:stretch>
-        </p:blipFill>
-        <p:spPr bwMode="auto">
-          <a:xfrm>
-            <a:off x="1667621" y="981540"/>
-            <a:ext cx="1050865" cy="1356885"/>
-          </a:xfrm>
-          <a:prstGeom prst="rect">
-            <a:avLst/>
-          </a:prstGeom>
-          <a:noFill/>
-          <a:extLst>
-            <a:ext uri="{909E8E84-426E-40DD-AFC4-6F175D3DCCD1}">
-              <a14:hiddenFill xmlns:a14="http://schemas.microsoft.com/office/drawing/2010/main">
-                <a:solidFill>
-                  <a:srgbClr val="FFFFFF"/>
-                </a:solidFill>
-              </a14:hiddenFill>
-            </a:ext>
-          </a:extLst>
-        </p:spPr>
-      </p:pic>
       <p:sp>
         <p:nvSpPr>
           <p:cNvPr id="15" name="8 Rectángulo">
@@ -3908,8 +3980,8 @@
         </p:nvSpPr>
         <p:spPr>
           <a:xfrm>
-            <a:off x="1199962" y="427522"/>
-            <a:ext cx="3201789" cy="461665"/>
+            <a:off x="682232" y="404702"/>
+            <a:ext cx="1391290" cy="369332"/>
           </a:xfrm>
           <a:prstGeom prst="rect">
             <a:avLst/>
@@ -3925,15 +3997,15 @@
           <a:lstStyle/>
           <a:p>
             <a:r>
-              <a:rPr lang="es-ES" sz="2400" b="1" dirty="0">
+              <a:rPr lang="es-ES" b="1" dirty="0">
                 <a:solidFill>
                   <a:schemeClr val="bg1"/>
                 </a:solidFill>
                 <a:latin typeface="Montserrat" pitchFamily="2" charset="0"/>
               </a:rPr>
-              <a:t>  YUCATÁN</a:t>
-            </a:r>
-            <a:endParaRPr lang="es-MX" sz="2400" dirty="0">
+              <a:t>YUCATÁN</a:t>
+            </a:r>
+            <a:endParaRPr lang="es-MX" dirty="0">
               <a:solidFill>
                 <a:schemeClr val="bg1"/>
               </a:solidFill>
@@ -3956,8 +4028,8 @@
         </p:nvSpPr>
         <p:spPr>
           <a:xfrm>
-            <a:off x="211492" y="2517270"/>
-            <a:ext cx="4105469" cy="646331"/>
+            <a:off x="218688" y="2103291"/>
+            <a:ext cx="2219714" cy="523220"/>
           </a:xfrm>
           <a:prstGeom prst="rect">
             <a:avLst/>
@@ -3974,23 +4046,47 @@
           <a:p>
             <a:pPr algn="ctr"/>
             <a:r>
-              <a:rPr lang="es-ES" b="1" dirty="0">
+              <a:rPr lang="es-MX" sz="1400" b="1" dirty="0">
                 <a:solidFill>
                   <a:schemeClr val="bg1"/>
                 </a:solidFill>
                 <a:latin typeface="Montserrat" pitchFamily="2" charset="0"/>
               </a:rPr>
-              <a:t>Mtro. Sergio A. Martínez C. Arroyo</a:t>
-            </a:r>
-            <a:endParaRPr lang="es-MX" dirty="0">
-              <a:solidFill>
-                <a:schemeClr val="bg1"/>
-              </a:solidFill>
-              <a:latin typeface="Montserrat" pitchFamily="2" charset="0"/>
-            </a:endParaRPr>
-          </a:p>
-        </p:txBody>
-      </p:sp>
+              <a:t>Luis Felipe Esperón Villanueva </a:t>
+            </a:r>
+          </a:p>
+        </p:txBody>
+      </p:sp>
+      <p:pic>
+        <p:nvPicPr>
+          <p:cNvPr id="3" name="Imagen 2">
+            <a:extLst>
+              <a:ext uri="{FF2B5EF4-FFF2-40B4-BE49-F238E27FC236}">
+                <a16:creationId xmlns:a16="http://schemas.microsoft.com/office/drawing/2014/main" id="{FFBE5D12-B077-468D-AC1D-A6F06EFA368C}"/>
+              </a:ext>
+            </a:extLst>
+          </p:cNvPr>
+          <p:cNvPicPr>
+            <a:picLocks noChangeAspect="1"/>
+          </p:cNvPicPr>
+          <p:nvPr/>
+        </p:nvPicPr>
+        <p:blipFill>
+          <a:blip r:embed="rId6"/>
+          <a:stretch>
+            <a:fillRect/>
+          </a:stretch>
+        </p:blipFill>
+        <p:spPr>
+          <a:xfrm>
+            <a:off x="901872" y="827869"/>
+            <a:ext cx="872498" cy="1201474"/>
+          </a:xfrm>
+          <a:prstGeom prst="rect">
+            <a:avLst/>
+          </a:prstGeom>
+        </p:spPr>
+      </p:pic>
     </p:spTree>
     <p:extLst>
       <p:ext uri="{BB962C8B-B14F-4D97-AF65-F5344CB8AC3E}">
@@ -4005,9 +4101,9 @@
 </file>
 
 <file path=ppt/theme/theme1.xml><?xml version="1.0" encoding="utf-8"?>
-<a:theme xmlns:a="http://schemas.openxmlformats.org/drawingml/2006/main" name="Office 2013 - Tema de 2022">
+<a:theme xmlns:a="http://schemas.openxmlformats.org/drawingml/2006/main" name="Tema de Office">
   <a:themeElements>
-    <a:clrScheme name="Office 2013 - Tema de 2022">
+    <a:clrScheme name="Tema de Office">
       <a:dk1>
         <a:sysClr val="windowText" lastClr="000000"/>
       </a:dk1>
@@ -4045,7 +4141,7 @@
         <a:srgbClr val="954F72"/>
       </a:folHlink>
     </a:clrScheme>
-    <a:fontScheme name="Office 2013 - Tema de 2022">
+    <a:fontScheme name="Tema de Office">
       <a:majorFont>
         <a:latin typeface="Calibri Light" panose="020F0302020204030204"/>
         <a:ea typeface=""/>
@@ -4117,7 +4213,7 @@
         <a:font script="Geor" typeface="Sylfaen"/>
       </a:minorFont>
     </a:fontScheme>
-    <a:fmtScheme name="Office 2013 - Tema de 2022">
+    <a:fmtScheme name="Tema de Office">
       <a:fillStyleLst>
         <a:solidFill>
           <a:schemeClr val="phClr"/>
@@ -4259,7 +4355,7 @@
   <a:extraClrSchemeLst/>
   <a:extLst>
     <a:ext uri="{05A4C25C-085E-4340-85A3-A5531E510DB2}">
-      <thm15:themeFamily xmlns:thm15="http://schemas.microsoft.com/office/thememl/2012/main" name="Office 2013 - 2022 Theme" id="{62F939B6-93AF-4DB8-9C6B-D6C7DFDC589F}" vid="{4A3C46E8-61CC-4603-A589-7422A47A8E4A}"/>
+      <thm15:themeFamily xmlns:thm15="http://schemas.microsoft.com/office/thememl/2012/main" name="Office Theme" id="{62F939B6-93AF-4DB8-9C6B-D6C7DFDC589F}" vid="{4A3C46E8-61CC-4603-A589-7422A47A8E4A}"/>
     </a:ext>
   </a:extLst>
 </a:theme>
